--- a/docs/AgentForge-PresentationV1.0.pptx
+++ b/docs/AgentForge-PresentationV1.0.pptx
@@ -21,6 +21,8 @@
     <p:sldId id="269" r:id="rId15"/>
     <p:sldId id="270" r:id="rId16"/>
     <p:sldId id="271" r:id="rId17"/>
+    <p:sldId id="272" r:id="rId18"/>
+    <p:sldId id="273" r:id="rId19"/>
   </p:sldIdLst>
   <p:sldSz cx="12188825" cy="6858000"/>
   <p:notesSz cx="6858000" cy="9144000"/>
@@ -3628,7 +3630,7 @@
         </p:nvSpPr>
         <p:spPr>
           <a:xfrm>
-            <a:off x="6858000" y="1097280"/>
+            <a:off x="6812280" y="-36575"/>
             <a:ext cx="5029200" cy="4114800"/>
           </a:xfrm>
           <a:prstGeom prst="rect">
@@ -3644,7 +3646,7 @@
           <a:p>
             <a:pPr algn="l"/>
             <a:r>
-              <a:rPr sz="20000" b="1" i="0">
+              <a:rPr sz="20000" b="1" i="0" dirty="0">
                 <a:solidFill>
                   <a:srgbClr val="112545"/>
                 </a:solidFill>
@@ -4125,7 +4127,7 @@
         </p:nvSpPr>
         <p:spPr>
           <a:xfrm>
-            <a:off x="8284464" y="1828800"/>
+            <a:off x="8279892" y="1828800"/>
             <a:ext cx="3657600" cy="2103120"/>
           </a:xfrm>
           <a:prstGeom prst="rect">
@@ -4171,7 +4173,7 @@
         </p:nvSpPr>
         <p:spPr>
           <a:xfrm>
-            <a:off x="8284464" y="1828800"/>
+            <a:off x="8279892" y="1828800"/>
             <a:ext cx="45720" cy="2103120"/>
           </a:xfrm>
           <a:prstGeom prst="rect">
@@ -4215,7 +4217,7 @@
         </p:nvSpPr>
         <p:spPr>
           <a:xfrm>
-            <a:off x="8394192" y="1920240"/>
+            <a:off x="8389620" y="1920240"/>
             <a:ext cx="3474720" cy="274320"/>
           </a:xfrm>
           <a:prstGeom prst="rect">
@@ -4249,7 +4251,7 @@
         </p:nvSpPr>
         <p:spPr>
           <a:xfrm>
-            <a:off x="8394192" y="2176272"/>
+            <a:off x="8389620" y="2176272"/>
             <a:ext cx="3474720" cy="1691639"/>
           </a:xfrm>
           <a:prstGeom prst="rect">
@@ -4443,7 +4445,7 @@
         </p:nvSpPr>
         <p:spPr>
           <a:xfrm>
-            <a:off x="4370832" y="4114800"/>
+            <a:off x="4366260" y="4114800"/>
             <a:ext cx="3657600" cy="2103120"/>
           </a:xfrm>
           <a:prstGeom prst="rect">
@@ -4489,7 +4491,7 @@
         </p:nvSpPr>
         <p:spPr>
           <a:xfrm>
-            <a:off x="4370832" y="4114800"/>
+            <a:off x="4366260" y="4114800"/>
             <a:ext cx="45720" cy="2103120"/>
           </a:xfrm>
           <a:prstGeom prst="rect">
@@ -4533,7 +4535,7 @@
         </p:nvSpPr>
         <p:spPr>
           <a:xfrm>
-            <a:off x="4480560" y="4206240"/>
+            <a:off x="4475988" y="4206240"/>
             <a:ext cx="3474720" cy="274320"/>
           </a:xfrm>
           <a:prstGeom prst="rect">
@@ -4567,7 +4569,7 @@
         </p:nvSpPr>
         <p:spPr>
           <a:xfrm>
-            <a:off x="4480560" y="4462272"/>
+            <a:off x="4475988" y="4462272"/>
             <a:ext cx="3474720" cy="1691639"/>
           </a:xfrm>
           <a:prstGeom prst="rect">
@@ -4602,7 +4604,7 @@
         </p:nvSpPr>
         <p:spPr>
           <a:xfrm>
-            <a:off x="8284464" y="4114800"/>
+            <a:off x="8279892" y="4114800"/>
             <a:ext cx="3657600" cy="2103120"/>
           </a:xfrm>
           <a:prstGeom prst="rect">
@@ -4648,7 +4650,7 @@
         </p:nvSpPr>
         <p:spPr>
           <a:xfrm>
-            <a:off x="8284464" y="4114800"/>
+            <a:off x="8279892" y="4114800"/>
             <a:ext cx="45720" cy="2103120"/>
           </a:xfrm>
           <a:prstGeom prst="rect">
@@ -4692,7 +4694,7 @@
         </p:nvSpPr>
         <p:spPr>
           <a:xfrm>
-            <a:off x="8394192" y="4206240"/>
+            <a:off x="8389620" y="4206240"/>
             <a:ext cx="3474720" cy="274320"/>
           </a:xfrm>
           <a:prstGeom prst="rect">
@@ -4726,7 +4728,7 @@
         </p:nvSpPr>
         <p:spPr>
           <a:xfrm>
-            <a:off x="8394192" y="4462272"/>
+            <a:off x="8389620" y="4462272"/>
             <a:ext cx="3474720" cy="1691639"/>
           </a:xfrm>
           <a:prstGeom prst="rect">
@@ -4863,7 +4865,7 @@
           <p:nvPr>
             <p:extLst>
               <p:ext uri="{D42A27DB-BD31-4B8C-83A1-F6EECF244321}">
-                <p14:modId xmlns:p14="http://schemas.microsoft.com/office/powerpoint/2010/main" val="2925637690"/>
+                <p14:modId xmlns:p14="http://schemas.microsoft.com/office/powerpoint/2010/main" val="4202419578"/>
               </p:ext>
             </p:extLst>
           </p:nvPr>
@@ -4980,9 +4982,9 @@
                     <a:bodyPr/>
                     <a:lstStyle/>
                     <a:p>
-                      <a:pPr algn="l"/>
+                      <a:pPr algn="ctr"/>
                       <a:r>
-                        <a:rPr sz="1000" b="1" dirty="0">
+                        <a:rPr sz="1000" b="1">
                           <a:solidFill>
                             <a:srgbClr val="1E293B"/>
                           </a:solidFill>
@@ -5002,10 +5004,7 @@
                     <a:bodyPr/>
                     <a:lstStyle/>
                     <a:p>
-                      <a:pPr marL="0" indent="0" algn="l">
-                        <a:buFont typeface="Arial" panose="020B0604020202020204" pitchFamily="34" charset="0"/>
-                        <a:buNone/>
-                      </a:pPr>
+                      <a:pPr algn="l"/>
                       <a:r>
                         <a:rPr sz="1000" b="0" dirty="0">
                           <a:solidFill>
@@ -5043,9 +5042,9 @@
                     <a:bodyPr/>
                     <a:lstStyle/>
                     <a:p>
-                      <a:pPr algn="l"/>
+                      <a:pPr algn="ctr"/>
                       <a:r>
-                        <a:rPr sz="1000" b="1" dirty="0">
+                        <a:rPr sz="1000" b="1">
                           <a:solidFill>
                             <a:srgbClr val="16A34A"/>
                           </a:solidFill>
@@ -5072,7 +5071,7 @@
                     <a:bodyPr/>
                     <a:lstStyle/>
                     <a:p>
-                      <a:pPr algn="l"/>
+                      <a:pPr algn="ctr"/>
                       <a:r>
                         <a:rPr sz="1000" b="1">
                           <a:solidFill>
@@ -5094,10 +5093,7 @@
                     <a:bodyPr/>
                     <a:lstStyle/>
                     <a:p>
-                      <a:pPr marL="0" indent="0" algn="l">
-                        <a:buFont typeface="Arial" panose="020B0604020202020204" pitchFamily="34" charset="0"/>
-                        <a:buNone/>
-                      </a:pPr>
+                      <a:pPr algn="l"/>
                       <a:r>
                         <a:rPr sz="1000" b="0">
                           <a:solidFill>
@@ -5119,7 +5115,7 @@
                     <a:bodyPr/>
                     <a:lstStyle/>
                     <a:p>
-                      <a:pPr algn="l"/>
+                      <a:pPr algn="ctr"/>
                       <a:r>
                         <a:rPr sz="1000" b="1">
                           <a:solidFill>
@@ -5148,7 +5144,7 @@
                     <a:bodyPr/>
                     <a:lstStyle/>
                     <a:p>
-                      <a:pPr algn="l"/>
+                      <a:pPr algn="ctr"/>
                       <a:r>
                         <a:rPr sz="1000" b="1">
                           <a:solidFill>
@@ -5170,10 +5166,7 @@
                     <a:bodyPr/>
                     <a:lstStyle/>
                     <a:p>
-                      <a:pPr marL="0" indent="0" algn="l">
-                        <a:buFont typeface="Arial" panose="020B0604020202020204" pitchFamily="34" charset="0"/>
-                        <a:buNone/>
-                      </a:pPr>
+                      <a:pPr algn="l"/>
                       <a:r>
                         <a:rPr sz="1000" b="0">
                           <a:solidFill>
@@ -5195,7 +5188,7 @@
                     <a:bodyPr/>
                     <a:lstStyle/>
                     <a:p>
-                      <a:pPr algn="l"/>
+                      <a:pPr algn="ctr"/>
                       <a:r>
                         <a:rPr sz="1000" b="1">
                           <a:solidFill>
@@ -5224,7 +5217,7 @@
                     <a:bodyPr/>
                     <a:lstStyle/>
                     <a:p>
-                      <a:pPr algn="l"/>
+                      <a:pPr algn="ctr"/>
                       <a:r>
                         <a:rPr sz="1000" b="1">
                           <a:solidFill>
@@ -5246,18 +5239,28 @@
                     <a:bodyPr/>
                     <a:lstStyle/>
                     <a:p>
-                      <a:pPr marL="0" indent="0" algn="l">
-                        <a:buFont typeface="Arial" panose="020B0604020202020204" pitchFamily="34" charset="0"/>
-                        <a:buNone/>
-                      </a:pPr>
+                      <a:pPr algn="l"/>
                       <a:r>
-                        <a:rPr sz="1000" b="0">
+                        <a:rPr sz="1000" b="0" dirty="0">
                           <a:solidFill>
                             <a:srgbClr val="1E293B"/>
                           </a:solidFill>
                         </a:rPr>
-                        <a:t>✅ LangChain+pgvector</a:t>
+                        <a:t>✅ </a:t>
                       </a:r>
+                      <a:r>
+                        <a:rPr sz="1000" b="0" dirty="0" err="1">
+                          <a:solidFill>
+                            <a:srgbClr val="1E293B"/>
+                          </a:solidFill>
+                        </a:rPr>
+                        <a:t>LangChain+pgvector</a:t>
+                      </a:r>
+                      <a:endParaRPr sz="1000" b="0" dirty="0">
+                        <a:solidFill>
+                          <a:srgbClr val="1E293B"/>
+                        </a:solidFill>
+                      </a:endParaRPr>
                     </a:p>
                   </a:txBody>
                   <a:tcPr>
@@ -5271,9 +5274,9 @@
                     <a:bodyPr/>
                     <a:lstStyle/>
                     <a:p>
-                      <a:pPr algn="l"/>
+                      <a:pPr algn="ctr"/>
                       <a:r>
-                        <a:rPr sz="1000" b="1" dirty="0">
+                        <a:rPr sz="1000" b="1">
                           <a:solidFill>
                             <a:srgbClr val="16A34A"/>
                           </a:solidFill>
@@ -5300,7 +5303,7 @@
                     <a:bodyPr/>
                     <a:lstStyle/>
                     <a:p>
-                      <a:pPr algn="l"/>
+                      <a:pPr algn="ctr"/>
                       <a:r>
                         <a:rPr sz="1000" b="1">
                           <a:solidFill>
@@ -5322,10 +5325,7 @@
                     <a:bodyPr/>
                     <a:lstStyle/>
                     <a:p>
-                      <a:pPr marL="0" indent="0" algn="l">
-                        <a:buFont typeface="Arial" panose="020B0604020202020204" pitchFamily="34" charset="0"/>
-                        <a:buNone/>
-                      </a:pPr>
+                      <a:pPr algn="l"/>
                       <a:r>
                         <a:rPr sz="1000" b="0">
                           <a:solidFill>
@@ -5347,7 +5347,7 @@
                     <a:bodyPr/>
                     <a:lstStyle/>
                     <a:p>
-                      <a:pPr algn="l"/>
+                      <a:pPr algn="ctr"/>
                       <a:r>
                         <a:rPr sz="1000" b="1">
                           <a:solidFill>
@@ -5376,7 +5376,7 @@
                     <a:bodyPr/>
                     <a:lstStyle/>
                     <a:p>
-                      <a:pPr algn="l"/>
+                      <a:pPr algn="ctr"/>
                       <a:r>
                         <a:rPr sz="1000" b="1">
                           <a:solidFill>
@@ -5398,10 +5398,7 @@
                     <a:bodyPr/>
                     <a:lstStyle/>
                     <a:p>
-                      <a:pPr marL="0" indent="0" algn="l">
-                        <a:buFont typeface="Arial" panose="020B0604020202020204" pitchFamily="34" charset="0"/>
-                        <a:buNone/>
-                      </a:pPr>
+                      <a:pPr algn="l"/>
                       <a:r>
                         <a:rPr sz="1000" b="0">
                           <a:solidFill>
@@ -5423,9 +5420,9 @@
                     <a:bodyPr/>
                     <a:lstStyle/>
                     <a:p>
-                      <a:pPr algn="l"/>
+                      <a:pPr algn="ctr"/>
                       <a:r>
-                        <a:rPr sz="1000" b="1" dirty="0">
+                        <a:rPr sz="1000" b="1">
                           <a:solidFill>
                             <a:srgbClr val="DC2626"/>
                           </a:solidFill>
@@ -5452,9 +5449,9 @@
                     <a:bodyPr/>
                     <a:lstStyle/>
                     <a:p>
-                      <a:pPr algn="l"/>
+                      <a:pPr algn="ctr"/>
                       <a:r>
-                        <a:rPr sz="1000" b="1" dirty="0">
+                        <a:rPr sz="1000" b="1">
                           <a:solidFill>
                             <a:srgbClr val="1E293B"/>
                           </a:solidFill>
@@ -5474,18 +5471,28 @@
                     <a:bodyPr/>
                     <a:lstStyle/>
                     <a:p>
-                      <a:pPr marL="0" indent="0" algn="l">
-                        <a:buFont typeface="Arial" panose="020B0604020202020204" pitchFamily="34" charset="0"/>
-                        <a:buNone/>
-                      </a:pPr>
+                      <a:pPr algn="l"/>
                       <a:r>
-                        <a:rPr sz="1000" b="0">
+                        <a:rPr sz="1000" b="0" dirty="0">
                           <a:solidFill>
                             <a:srgbClr val="1E293B"/>
                           </a:solidFill>
                         </a:rPr>
-                        <a:t>✅ Full FastAPI</a:t>
+                        <a:t>✅ Full </a:t>
                       </a:r>
+                      <a:r>
+                        <a:rPr sz="1000" b="0" dirty="0" err="1">
+                          <a:solidFill>
+                            <a:srgbClr val="1E293B"/>
+                          </a:solidFill>
+                        </a:rPr>
+                        <a:t>FastAPI</a:t>
+                      </a:r>
+                      <a:endParaRPr sz="1000" b="0" dirty="0">
+                        <a:solidFill>
+                          <a:srgbClr val="1E293B"/>
+                        </a:solidFill>
+                      </a:endParaRPr>
                     </a:p>
                   </a:txBody>
                   <a:tcPr>
@@ -5499,9 +5506,9 @@
                     <a:bodyPr/>
                     <a:lstStyle/>
                     <a:p>
-                      <a:pPr algn="l"/>
+                      <a:pPr algn="ctr"/>
                       <a:r>
-                        <a:rPr sz="1000" b="1" dirty="0">
+                        <a:rPr sz="1000" b="1">
                           <a:solidFill>
                             <a:srgbClr val="16A34A"/>
                           </a:solidFill>
@@ -5528,7 +5535,7 @@
                     <a:bodyPr/>
                     <a:lstStyle/>
                     <a:p>
-                      <a:pPr algn="l"/>
+                      <a:pPr algn="ctr"/>
                       <a:r>
                         <a:rPr sz="1000" b="1">
                           <a:solidFill>
@@ -5550,10 +5557,7 @@
                     <a:bodyPr/>
                     <a:lstStyle/>
                     <a:p>
-                      <a:pPr marL="0" indent="0" algn="l">
-                        <a:buFont typeface="Arial" panose="020B0604020202020204" pitchFamily="34" charset="0"/>
-                        <a:buNone/>
-                      </a:pPr>
+                      <a:pPr algn="l"/>
                       <a:r>
                         <a:rPr sz="1000" b="0">
                           <a:solidFill>
@@ -5575,9 +5579,9 @@
                     <a:bodyPr/>
                     <a:lstStyle/>
                     <a:p>
-                      <a:pPr algn="l"/>
+                      <a:pPr algn="ctr"/>
                       <a:r>
-                        <a:rPr sz="1000" b="0" dirty="0">
+                        <a:rPr sz="1000" b="0">
                           <a:solidFill>
                             <a:srgbClr val="1E293B"/>
                           </a:solidFill>
@@ -5604,7 +5608,7 @@
                     <a:bodyPr/>
                     <a:lstStyle/>
                     <a:p>
-                      <a:pPr algn="l"/>
+                      <a:pPr algn="ctr"/>
                       <a:r>
                         <a:rPr sz="1000" b="1">
                           <a:solidFill>
@@ -5626,12 +5630,9 @@
                     <a:bodyPr/>
                     <a:lstStyle/>
                     <a:p>
-                      <a:pPr marL="0" indent="0" algn="l">
-                        <a:buFont typeface="Arial" panose="020B0604020202020204" pitchFamily="34" charset="0"/>
-                        <a:buNone/>
-                      </a:pPr>
+                      <a:pPr algn="l"/>
                       <a:r>
-                        <a:rPr sz="1000" b="0">
+                        <a:rPr sz="1000" b="0" dirty="0">
                           <a:solidFill>
                             <a:srgbClr val="1E293B"/>
                           </a:solidFill>
@@ -5651,9 +5652,9 @@
                     <a:bodyPr/>
                     <a:lstStyle/>
                     <a:p>
-                      <a:pPr algn="l"/>
+                      <a:pPr algn="ctr"/>
                       <a:r>
-                        <a:rPr sz="1000" b="0" dirty="0">
+                        <a:rPr sz="1000" b="0">
                           <a:solidFill>
                             <a:srgbClr val="1E293B"/>
                           </a:solidFill>
@@ -5680,7 +5681,7 @@
                     <a:bodyPr/>
                     <a:lstStyle/>
                     <a:p>
-                      <a:pPr algn="l"/>
+                      <a:pPr algn="ctr"/>
                       <a:r>
                         <a:rPr sz="1000" b="1">
                           <a:solidFill>
@@ -5702,12 +5703,9 @@
                     <a:bodyPr/>
                     <a:lstStyle/>
                     <a:p>
-                      <a:pPr marL="0" indent="0" algn="l">
-                        <a:buFont typeface="Arial" panose="020B0604020202020204" pitchFamily="34" charset="0"/>
-                        <a:buNone/>
-                      </a:pPr>
+                      <a:pPr algn="l"/>
                       <a:r>
-                        <a:rPr sz="1000" b="0">
+                        <a:rPr sz="1000" b="0" dirty="0">
                           <a:solidFill>
                             <a:srgbClr val="1E293B"/>
                           </a:solidFill>
@@ -5727,9 +5725,9 @@
                     <a:bodyPr/>
                     <a:lstStyle/>
                     <a:p>
-                      <a:pPr algn="l"/>
+                      <a:pPr algn="ctr"/>
                       <a:r>
-                        <a:rPr sz="1000" b="0" dirty="0">
+                        <a:rPr sz="1000" b="0">
                           <a:solidFill>
                             <a:srgbClr val="1E293B"/>
                           </a:solidFill>
@@ -5756,9 +5754,9 @@
                     <a:bodyPr/>
                     <a:lstStyle/>
                     <a:p>
-                      <a:pPr algn="l"/>
+                      <a:pPr algn="ctr"/>
                       <a:r>
-                        <a:rPr sz="1000" b="1" dirty="0">
+                        <a:rPr sz="1000" b="1">
                           <a:solidFill>
                             <a:srgbClr val="1E293B"/>
                           </a:solidFill>
@@ -5778,10 +5776,7 @@
                     <a:bodyPr/>
                     <a:lstStyle/>
                     <a:p>
-                      <a:pPr marL="0" indent="0" algn="l">
-                        <a:buFont typeface="Arial" panose="020B0604020202020204" pitchFamily="34" charset="0"/>
-                        <a:buNone/>
-                      </a:pPr>
+                      <a:pPr algn="l"/>
                       <a:r>
                         <a:rPr sz="1000" b="0" dirty="0">
                           <a:solidFill>
@@ -5803,7 +5798,7 @@
                     <a:bodyPr/>
                     <a:lstStyle/>
                     <a:p>
-                      <a:pPr algn="l"/>
+                      <a:pPr algn="ctr"/>
                       <a:r>
                         <a:rPr sz="1000" b="1" dirty="0">
                           <a:solidFill>
@@ -9979,93 +9974,23 @@
       </p:sp>
       <p:sp>
         <p:nvSpPr>
-          <p:cNvPr id="3" name="TextBox 2"/>
-          <p:cNvSpPr txBox="1"/>
-          <p:nvPr/>
-        </p:nvSpPr>
-        <p:spPr>
-          <a:xfrm>
-            <a:off x="457200" y="320040"/>
-            <a:ext cx="10972800" cy="365760"/>
-          </a:xfrm>
-          <a:prstGeom prst="rect">
-            <a:avLst/>
-          </a:prstGeom>
-          <a:noFill/>
-        </p:spPr>
-        <p:txBody>
-          <a:bodyPr wrap="square">
-            <a:spAutoFit/>
-          </a:bodyPr>
-          <a:lstStyle/>
-          <a:p>
-            <a:pPr algn="l"/>
-            <a:r>
-              <a:rPr sz="1000" b="1" i="0">
-                <a:solidFill>
-                  <a:srgbClr val="D0D8E8"/>
-                </a:solidFill>
-              </a:rPr>
-              <a:t>STRATEGIC ROADMAP</a:t>
-            </a:r>
-          </a:p>
-        </p:txBody>
-      </p:sp>
-      <p:sp>
-        <p:nvSpPr>
-          <p:cNvPr id="4" name="TextBox 3"/>
-          <p:cNvSpPr txBox="1"/>
-          <p:nvPr/>
-        </p:nvSpPr>
-        <p:spPr>
-          <a:xfrm>
-            <a:off x="457200" y="640080"/>
-            <a:ext cx="10972800" cy="1097280"/>
-          </a:xfrm>
-          <a:prstGeom prst="rect">
-            <a:avLst/>
-          </a:prstGeom>
-          <a:noFill/>
-        </p:spPr>
-        <p:txBody>
-          <a:bodyPr wrap="square">
-            <a:spAutoFit/>
-          </a:bodyPr>
-          <a:lstStyle/>
-          <a:p>
-            <a:pPr algn="l"/>
-            <a:r>
-              <a:rPr sz="2800" b="1" i="0">
-                <a:solidFill>
-                  <a:srgbClr val="FFFFFF"/>
-                </a:solidFill>
-              </a:rPr>
-              <a:t>What Comes Next</a:t>
-            </a:r>
-          </a:p>
-        </p:txBody>
-      </p:sp>
-      <p:sp>
-        <p:nvSpPr>
-          <p:cNvPr id="5" name="Rectangle 4"/>
+          <p:cNvPr id="3" name="Rectangle 2"/>
           <p:cNvSpPr/>
           <p:nvPr/>
         </p:nvSpPr>
         <p:spPr>
           <a:xfrm>
-            <a:off x="457200" y="1828800"/>
-            <a:ext cx="3657600" cy="2148840"/>
+            <a:off x="0" y="0"/>
+            <a:ext cx="12188952" cy="64008"/>
           </a:xfrm>
           <a:prstGeom prst="rect">
             <a:avLst/>
           </a:prstGeom>
           <a:solidFill>
-            <a:srgbClr val="102040"/>
+            <a:srgbClr val="0F6E56"/>
           </a:solidFill>
-          <a:ln w="6350">
-            <a:solidFill>
-              <a:srgbClr val="334D80"/>
-            </a:solidFill>
+          <a:ln>
+            <a:noFill/>
           </a:ln>
         </p:spPr>
         <p:style>
@@ -10093,14 +10018,1072 @@
       </p:sp>
       <p:sp>
         <p:nvSpPr>
-          <p:cNvPr id="6" name="Rectangle 5"/>
+          <p:cNvPr id="4" name="TextBox 3"/>
+          <p:cNvSpPr txBox="1"/>
+          <p:nvPr/>
+        </p:nvSpPr>
+        <p:spPr>
+          <a:xfrm>
+            <a:off x="457200" y="182880"/>
+            <a:ext cx="7315200" cy="320040"/>
+          </a:xfrm>
+          <a:prstGeom prst="rect">
+            <a:avLst/>
+          </a:prstGeom>
+          <a:noFill/>
+        </p:spPr>
+        <p:txBody>
+          <a:bodyPr wrap="square">
+            <a:spAutoFit/>
+          </a:bodyPr>
+          <a:lstStyle/>
+          <a:p>
+            <a:pPr algn="l"/>
+            <a:r>
+              <a:rPr sz="1000" b="1" i="0">
+                <a:solidFill>
+                  <a:srgbClr val="4DCCAA"/>
+                </a:solidFill>
+              </a:rPr>
+              <a:t>END-TO-END OBSERVABILITY</a:t>
+            </a:r>
+          </a:p>
+        </p:txBody>
+      </p:sp>
+      <p:sp>
+        <p:nvSpPr>
+          <p:cNvPr id="5" name="TextBox 4"/>
+          <p:cNvSpPr txBox="1"/>
+          <p:nvPr/>
+        </p:nvSpPr>
+        <p:spPr>
+          <a:xfrm>
+            <a:off x="457200" y="502920"/>
+            <a:ext cx="10972800" cy="685800"/>
+          </a:xfrm>
+          <a:prstGeom prst="rect">
+            <a:avLst/>
+          </a:prstGeom>
+          <a:noFill/>
+        </p:spPr>
+        <p:txBody>
+          <a:bodyPr wrap="square">
+            <a:spAutoFit/>
+          </a:bodyPr>
+          <a:lstStyle/>
+          <a:p>
+            <a:pPr algn="l"/>
+            <a:r>
+              <a:rPr sz="2800" b="1" i="0">
+                <a:solidFill>
+                  <a:srgbClr val="FFFFFF"/>
+                </a:solidFill>
+              </a:rPr>
+              <a:t>OpenTelemetry Distributed Tracing</a:t>
+            </a:r>
+          </a:p>
+        </p:txBody>
+      </p:sp>
+      <p:sp>
+        <p:nvSpPr>
+          <p:cNvPr id="6" name="TextBox 5"/>
+          <p:cNvSpPr txBox="1"/>
+          <p:nvPr/>
+        </p:nvSpPr>
+        <p:spPr>
+          <a:xfrm>
+            <a:off x="457200" y="1188720"/>
+            <a:ext cx="10972800" cy="347472"/>
+          </a:xfrm>
+          <a:prstGeom prst="rect">
+            <a:avLst/>
+          </a:prstGeom>
+          <a:noFill/>
+        </p:spPr>
+        <p:txBody>
+          <a:bodyPr wrap="square">
+            <a:spAutoFit/>
+          </a:bodyPr>
+          <a:lstStyle/>
+          <a:p>
+            <a:pPr algn="l"/>
+            <a:r>
+              <a:rPr sz="1200" b="0" i="0">
+                <a:solidFill>
+                  <a:srgbClr val="D0D8E8"/>
+                </a:solidFill>
+              </a:rPr>
+              <a:t>Instrument once · Route to any backend · One env var switches the entire pipeline</a:t>
+            </a:r>
+          </a:p>
+        </p:txBody>
+      </p:sp>
+      <p:sp>
+        <p:nvSpPr>
+          <p:cNvPr id="7" name="Rectangle 6"/>
           <p:cNvSpPr/>
           <p:nvPr/>
         </p:nvSpPr>
         <p:spPr>
           <a:xfrm>
-            <a:off x="457200" y="1828800"/>
-            <a:ext cx="45720" cy="2148840"/>
+            <a:off x="457200" y="1691640"/>
+            <a:ext cx="7132320" cy="4892040"/>
+          </a:xfrm>
+          <a:prstGeom prst="rect">
+            <a:avLst/>
+          </a:prstGeom>
+          <a:solidFill>
+            <a:srgbClr val="041220"/>
+          </a:solidFill>
+          <a:ln w="12700">
+            <a:solidFill>
+              <a:srgbClr val="1A8A6E"/>
+            </a:solidFill>
+          </a:ln>
+        </p:spPr>
+        <p:style>
+          <a:lnRef idx="1">
+            <a:schemeClr val="accent1"/>
+          </a:lnRef>
+          <a:fillRef idx="3">
+            <a:schemeClr val="accent1"/>
+          </a:fillRef>
+          <a:effectRef idx="2">
+            <a:schemeClr val="accent1"/>
+          </a:effectRef>
+          <a:fontRef idx="minor">
+            <a:schemeClr val="lt1"/>
+          </a:fontRef>
+        </p:style>
+        <p:txBody>
+          <a:bodyPr rtlCol="0" anchor="ctr"/>
+          <a:lstStyle/>
+          <a:p>
+            <a:pPr algn="ctr"/>
+            <a:endParaRPr/>
+          </a:p>
+        </p:txBody>
+      </p:sp>
+      <p:sp>
+        <p:nvSpPr>
+          <p:cNvPr id="8" name="TextBox 7"/>
+          <p:cNvSpPr txBox="1"/>
+          <p:nvPr/>
+        </p:nvSpPr>
+        <p:spPr>
+          <a:xfrm>
+            <a:off x="594360" y="1755648"/>
+            <a:ext cx="6858000" cy="292608"/>
+          </a:xfrm>
+          <a:prstGeom prst="rect">
+            <a:avLst/>
+          </a:prstGeom>
+          <a:noFill/>
+        </p:spPr>
+        <p:txBody>
+          <a:bodyPr wrap="square">
+            <a:spAutoFit/>
+          </a:bodyPr>
+          <a:lstStyle/>
+          <a:p>
+            <a:pPr algn="l"/>
+            <a:r>
+              <a:rPr sz="900" b="1" i="0">
+                <a:solidFill>
+                  <a:srgbClr val="4DCCAA"/>
+                </a:solidFill>
+              </a:rPr>
+              <a:t>SPAN WATERFALL — EVERY AGENT RUN</a:t>
+            </a:r>
+          </a:p>
+        </p:txBody>
+      </p:sp>
+      <p:sp>
+        <p:nvSpPr>
+          <p:cNvPr id="9" name="Rectangle 8"/>
+          <p:cNvSpPr/>
+          <p:nvPr/>
+        </p:nvSpPr>
+        <p:spPr>
+          <a:xfrm>
+            <a:off x="594360" y="2148840"/>
+            <a:ext cx="6675120" cy="457200"/>
+          </a:xfrm>
+          <a:prstGeom prst="rect">
+            <a:avLst/>
+          </a:prstGeom>
+          <a:solidFill>
+            <a:srgbClr val="185FA5"/>
+          </a:solidFill>
+          <a:ln>
+            <a:noFill/>
+          </a:ln>
+        </p:spPr>
+        <p:style>
+          <a:lnRef idx="1">
+            <a:schemeClr val="accent1"/>
+          </a:lnRef>
+          <a:fillRef idx="3">
+            <a:schemeClr val="accent1"/>
+          </a:fillRef>
+          <a:effectRef idx="2">
+            <a:schemeClr val="accent1"/>
+          </a:effectRef>
+          <a:fontRef idx="minor">
+            <a:schemeClr val="lt1"/>
+          </a:fontRef>
+        </p:style>
+        <p:txBody>
+          <a:bodyPr rtlCol="0" anchor="ctr"/>
+          <a:lstStyle/>
+          <a:p>
+            <a:pPr algn="ctr"/>
+            <a:endParaRPr/>
+          </a:p>
+        </p:txBody>
+      </p:sp>
+      <p:sp>
+        <p:nvSpPr>
+          <p:cNvPr id="10" name="TextBox 9"/>
+          <p:cNvSpPr txBox="1"/>
+          <p:nvPr/>
+        </p:nvSpPr>
+        <p:spPr>
+          <a:xfrm>
+            <a:off x="621792" y="2185416"/>
+            <a:ext cx="6629400" cy="228600"/>
+          </a:xfrm>
+          <a:prstGeom prst="rect">
+            <a:avLst/>
+          </a:prstGeom>
+          <a:noFill/>
+        </p:spPr>
+        <p:txBody>
+          <a:bodyPr wrap="square">
+            <a:spAutoFit/>
+          </a:bodyPr>
+          <a:lstStyle/>
+          <a:p>
+            <a:pPr algn="l"/>
+            <a:r>
+              <a:rPr sz="1100" b="1" i="0">
+                <a:solidFill>
+                  <a:srgbClr val="FFFFFF"/>
+                </a:solidFill>
+              </a:rPr>
+              <a:t>HTTP request</a:t>
+            </a:r>
+          </a:p>
+        </p:txBody>
+      </p:sp>
+      <p:sp>
+        <p:nvSpPr>
+          <p:cNvPr id="11" name="TextBox 10"/>
+          <p:cNvSpPr txBox="1"/>
+          <p:nvPr/>
+        </p:nvSpPr>
+        <p:spPr>
+          <a:xfrm>
+            <a:off x="621792" y="2395728"/>
+            <a:ext cx="6400800" cy="201168"/>
+          </a:xfrm>
+          <a:prstGeom prst="rect">
+            <a:avLst/>
+          </a:prstGeom>
+          <a:noFill/>
+        </p:spPr>
+        <p:txBody>
+          <a:bodyPr wrap="square">
+            <a:spAutoFit/>
+          </a:bodyPr>
+          <a:lstStyle/>
+          <a:p>
+            <a:pPr algn="l"/>
+            <a:r>
+              <a:rPr sz="800" b="0" i="0">
+                <a:solidFill>
+                  <a:srgbClr val="93C5FD"/>
+                </a:solidFill>
+              </a:rPr>
+              <a:t>FastAPI middleware (auto)</a:t>
+            </a:r>
+          </a:p>
+        </p:txBody>
+      </p:sp>
+      <p:sp>
+        <p:nvSpPr>
+          <p:cNvPr id="12" name="Rectangle 11"/>
+          <p:cNvSpPr/>
+          <p:nvPr/>
+        </p:nvSpPr>
+        <p:spPr>
+          <a:xfrm>
+            <a:off x="822960" y="2898648"/>
+            <a:ext cx="6217920" cy="457200"/>
+          </a:xfrm>
+          <a:prstGeom prst="rect">
+            <a:avLst/>
+          </a:prstGeom>
+          <a:solidFill>
+            <a:srgbClr val="533AB7"/>
+          </a:solidFill>
+          <a:ln>
+            <a:noFill/>
+          </a:ln>
+        </p:spPr>
+        <p:style>
+          <a:lnRef idx="1">
+            <a:schemeClr val="accent1"/>
+          </a:lnRef>
+          <a:fillRef idx="3">
+            <a:schemeClr val="accent1"/>
+          </a:fillRef>
+          <a:effectRef idx="2">
+            <a:schemeClr val="accent1"/>
+          </a:effectRef>
+          <a:fontRef idx="minor">
+            <a:schemeClr val="lt1"/>
+          </a:fontRef>
+        </p:style>
+        <p:txBody>
+          <a:bodyPr rtlCol="0" anchor="ctr"/>
+          <a:lstStyle/>
+          <a:p>
+            <a:pPr algn="ctr"/>
+            <a:endParaRPr/>
+          </a:p>
+        </p:txBody>
+      </p:sp>
+      <p:sp>
+        <p:nvSpPr>
+          <p:cNvPr id="13" name="TextBox 12"/>
+          <p:cNvSpPr txBox="1"/>
+          <p:nvPr/>
+        </p:nvSpPr>
+        <p:spPr>
+          <a:xfrm>
+            <a:off x="850392" y="2935224"/>
+            <a:ext cx="6172200" cy="228600"/>
+          </a:xfrm>
+          <a:prstGeom prst="rect">
+            <a:avLst/>
+          </a:prstGeom>
+          <a:noFill/>
+        </p:spPr>
+        <p:txBody>
+          <a:bodyPr wrap="square">
+            <a:spAutoFit/>
+          </a:bodyPr>
+          <a:lstStyle/>
+          <a:p>
+            <a:pPr algn="l"/>
+            <a:r>
+              <a:rPr sz="1100" b="1" i="0">
+                <a:solidFill>
+                  <a:srgbClr val="FFFFFF"/>
+                </a:solidFill>
+              </a:rPr>
+              <a:t>  agent.run</a:t>
+            </a:r>
+          </a:p>
+        </p:txBody>
+      </p:sp>
+      <p:sp>
+        <p:nvSpPr>
+          <p:cNvPr id="14" name="TextBox 13"/>
+          <p:cNvSpPr txBox="1"/>
+          <p:nvPr/>
+        </p:nvSpPr>
+        <p:spPr>
+          <a:xfrm>
+            <a:off x="850392" y="3145536"/>
+            <a:ext cx="6400800" cy="201168"/>
+          </a:xfrm>
+          <a:prstGeom prst="rect">
+            <a:avLst/>
+          </a:prstGeom>
+          <a:noFill/>
+        </p:spPr>
+        <p:txBody>
+          <a:bodyPr wrap="square">
+            <a:spAutoFit/>
+          </a:bodyPr>
+          <a:lstStyle/>
+          <a:p>
+            <a:pPr algn="l"/>
+            <a:r>
+              <a:rPr sz="800" b="0" i="0">
+                <a:solidFill>
+                  <a:srgbClr val="C4B5FD"/>
+                </a:solidFill>
+              </a:rPr>
+              <a:t>agent.name · agent.model · latency_ms · guardrail_triggered</a:t>
+            </a:r>
+          </a:p>
+        </p:txBody>
+      </p:sp>
+      <p:sp>
+        <p:nvSpPr>
+          <p:cNvPr id="15" name="Rectangle 14"/>
+          <p:cNvSpPr/>
+          <p:nvPr/>
+        </p:nvSpPr>
+        <p:spPr>
+          <a:xfrm>
+            <a:off x="1051560" y="3648456"/>
+            <a:ext cx="5303520" cy="457200"/>
+          </a:xfrm>
+          <a:prstGeom prst="rect">
+            <a:avLst/>
+          </a:prstGeom>
+          <a:solidFill>
+            <a:srgbClr val="0F6E56"/>
+          </a:solidFill>
+          <a:ln>
+            <a:noFill/>
+          </a:ln>
+        </p:spPr>
+        <p:style>
+          <a:lnRef idx="1">
+            <a:schemeClr val="accent1"/>
+          </a:lnRef>
+          <a:fillRef idx="3">
+            <a:schemeClr val="accent1"/>
+          </a:fillRef>
+          <a:effectRef idx="2">
+            <a:schemeClr val="accent1"/>
+          </a:effectRef>
+          <a:fontRef idx="minor">
+            <a:schemeClr val="lt1"/>
+          </a:fontRef>
+        </p:style>
+        <p:txBody>
+          <a:bodyPr rtlCol="0" anchor="ctr"/>
+          <a:lstStyle/>
+          <a:p>
+            <a:pPr algn="ctr"/>
+            <a:endParaRPr/>
+          </a:p>
+        </p:txBody>
+      </p:sp>
+      <p:sp>
+        <p:nvSpPr>
+          <p:cNvPr id="16" name="TextBox 15"/>
+          <p:cNvSpPr txBox="1"/>
+          <p:nvPr/>
+        </p:nvSpPr>
+        <p:spPr>
+          <a:xfrm>
+            <a:off x="1078992" y="3685032"/>
+            <a:ext cx="5257800" cy="228600"/>
+          </a:xfrm>
+          <a:prstGeom prst="rect">
+            <a:avLst/>
+          </a:prstGeom>
+          <a:noFill/>
+        </p:spPr>
+        <p:txBody>
+          <a:bodyPr wrap="square">
+            <a:spAutoFit/>
+          </a:bodyPr>
+          <a:lstStyle/>
+          <a:p>
+            <a:pPr algn="l"/>
+            <a:r>
+              <a:rPr sz="1100" b="1" i="0">
+                <a:solidFill>
+                  <a:srgbClr val="FFFFFF"/>
+                </a:solidFill>
+              </a:rPr>
+              <a:t>    llm.chat</a:t>
+            </a:r>
+          </a:p>
+        </p:txBody>
+      </p:sp>
+      <p:sp>
+        <p:nvSpPr>
+          <p:cNvPr id="17" name="TextBox 16"/>
+          <p:cNvSpPr txBox="1"/>
+          <p:nvPr/>
+        </p:nvSpPr>
+        <p:spPr>
+          <a:xfrm>
+            <a:off x="1078992" y="3895344"/>
+            <a:ext cx="6400800" cy="201168"/>
+          </a:xfrm>
+          <a:prstGeom prst="rect">
+            <a:avLst/>
+          </a:prstGeom>
+          <a:noFill/>
+        </p:spPr>
+        <p:txBody>
+          <a:bodyPr wrap="square">
+            <a:spAutoFit/>
+          </a:bodyPr>
+          <a:lstStyle/>
+          <a:p>
+            <a:pPr algn="l"/>
+            <a:r>
+              <a:rPr sz="800" b="0" i="0">
+                <a:solidFill>
+                  <a:srgbClr val="6EE7B7"/>
+                </a:solidFill>
+              </a:rPr>
+              <a:t>llm.provider=azure_openai · llm.model · tokens · response_length</a:t>
+            </a:r>
+          </a:p>
+        </p:txBody>
+      </p:sp>
+      <p:sp>
+        <p:nvSpPr>
+          <p:cNvPr id="18" name="Rectangle 17"/>
+          <p:cNvSpPr/>
+          <p:nvPr/>
+        </p:nvSpPr>
+        <p:spPr>
+          <a:xfrm>
+            <a:off x="1051560" y="4398264"/>
+            <a:ext cx="4389120" cy="457200"/>
+          </a:xfrm>
+          <a:prstGeom prst="rect">
+            <a:avLst/>
+          </a:prstGeom>
+          <a:solidFill>
+            <a:srgbClr val="A32D2D"/>
+          </a:solidFill>
+          <a:ln>
+            <a:noFill/>
+          </a:ln>
+        </p:spPr>
+        <p:style>
+          <a:lnRef idx="1">
+            <a:schemeClr val="accent1"/>
+          </a:lnRef>
+          <a:fillRef idx="3">
+            <a:schemeClr val="accent1"/>
+          </a:fillRef>
+          <a:effectRef idx="2">
+            <a:schemeClr val="accent1"/>
+          </a:effectRef>
+          <a:fontRef idx="minor">
+            <a:schemeClr val="lt1"/>
+          </a:fontRef>
+        </p:style>
+        <p:txBody>
+          <a:bodyPr rtlCol="0" anchor="ctr"/>
+          <a:lstStyle/>
+          <a:p>
+            <a:pPr algn="ctr"/>
+            <a:endParaRPr/>
+          </a:p>
+        </p:txBody>
+      </p:sp>
+      <p:sp>
+        <p:nvSpPr>
+          <p:cNvPr id="19" name="TextBox 18"/>
+          <p:cNvSpPr txBox="1"/>
+          <p:nvPr/>
+        </p:nvSpPr>
+        <p:spPr>
+          <a:xfrm>
+            <a:off x="1078992" y="4434840"/>
+            <a:ext cx="4343400" cy="228600"/>
+          </a:xfrm>
+          <a:prstGeom prst="rect">
+            <a:avLst/>
+          </a:prstGeom>
+          <a:noFill/>
+        </p:spPr>
+        <p:txBody>
+          <a:bodyPr wrap="square">
+            <a:spAutoFit/>
+          </a:bodyPr>
+          <a:lstStyle/>
+          <a:p>
+            <a:pPr algn="l"/>
+            <a:r>
+              <a:rPr sz="1100" b="1" i="0">
+                <a:solidFill>
+                  <a:srgbClr val="FFFFFF"/>
+                </a:solidFill>
+              </a:rPr>
+              <a:t>    guardrails.check</a:t>
+            </a:r>
+          </a:p>
+        </p:txBody>
+      </p:sp>
+      <p:sp>
+        <p:nvSpPr>
+          <p:cNvPr id="20" name="TextBox 19"/>
+          <p:cNvSpPr txBox="1"/>
+          <p:nvPr/>
+        </p:nvSpPr>
+        <p:spPr>
+          <a:xfrm>
+            <a:off x="1078992" y="4645152"/>
+            <a:ext cx="6400800" cy="201168"/>
+          </a:xfrm>
+          <a:prstGeom prst="rect">
+            <a:avLst/>
+          </a:prstGeom>
+          <a:noFill/>
+        </p:spPr>
+        <p:txBody>
+          <a:bodyPr wrap="square">
+            <a:spAutoFit/>
+          </a:bodyPr>
+          <a:lstStyle/>
+          <a:p>
+            <a:pPr algn="l"/>
+            <a:r>
+              <a:rPr sz="800" b="0" i="0">
+                <a:solidFill>
+                  <a:srgbClr val="F87171"/>
+                </a:solidFill>
+              </a:rPr>
+              <a:t>pii_enabled · pii_triggered · hallucination_triggered</a:t>
+            </a:r>
+          </a:p>
+        </p:txBody>
+      </p:sp>
+      <p:sp>
+        <p:nvSpPr>
+          <p:cNvPr id="21" name="Rectangle 20"/>
+          <p:cNvSpPr/>
+          <p:nvPr/>
+        </p:nvSpPr>
+        <p:spPr>
+          <a:xfrm>
+            <a:off x="1051560" y="5148072"/>
+            <a:ext cx="3840480" cy="457200"/>
+          </a:xfrm>
+          <a:prstGeom prst="rect">
+            <a:avLst/>
+          </a:prstGeom>
+          <a:solidFill>
+            <a:srgbClr val="854F0B"/>
+          </a:solidFill>
+          <a:ln>
+            <a:noFill/>
+          </a:ln>
+        </p:spPr>
+        <p:style>
+          <a:lnRef idx="1">
+            <a:schemeClr val="accent1"/>
+          </a:lnRef>
+          <a:fillRef idx="3">
+            <a:schemeClr val="accent1"/>
+          </a:fillRef>
+          <a:effectRef idx="2">
+            <a:schemeClr val="accent1"/>
+          </a:effectRef>
+          <a:fontRef idx="minor">
+            <a:schemeClr val="lt1"/>
+          </a:fontRef>
+        </p:style>
+        <p:txBody>
+          <a:bodyPr rtlCol="0" anchor="ctr"/>
+          <a:lstStyle/>
+          <a:p>
+            <a:pPr algn="ctr"/>
+            <a:endParaRPr/>
+          </a:p>
+        </p:txBody>
+      </p:sp>
+      <p:sp>
+        <p:nvSpPr>
+          <p:cNvPr id="22" name="TextBox 21"/>
+          <p:cNvSpPr txBox="1"/>
+          <p:nvPr/>
+        </p:nvSpPr>
+        <p:spPr>
+          <a:xfrm>
+            <a:off x="1078992" y="5184648"/>
+            <a:ext cx="3794760" cy="228600"/>
+          </a:xfrm>
+          <a:prstGeom prst="rect">
+            <a:avLst/>
+          </a:prstGeom>
+          <a:noFill/>
+        </p:spPr>
+        <p:txBody>
+          <a:bodyPr wrap="square">
+            <a:spAutoFit/>
+          </a:bodyPr>
+          <a:lstStyle/>
+          <a:p>
+            <a:pPr algn="l"/>
+            <a:r>
+              <a:rPr sz="1100" b="1" i="0">
+                <a:solidFill>
+                  <a:srgbClr val="FFFFFF"/>
+                </a:solidFill>
+              </a:rPr>
+              <a:t>    rag.query</a:t>
+            </a:r>
+          </a:p>
+        </p:txBody>
+      </p:sp>
+      <p:sp>
+        <p:nvSpPr>
+          <p:cNvPr id="23" name="TextBox 22"/>
+          <p:cNvSpPr txBox="1"/>
+          <p:nvPr/>
+        </p:nvSpPr>
+        <p:spPr>
+          <a:xfrm>
+            <a:off x="1078992" y="5394960"/>
+            <a:ext cx="6400800" cy="201168"/>
+          </a:xfrm>
+          <a:prstGeom prst="rect">
+            <a:avLst/>
+          </a:prstGeom>
+          <a:noFill/>
+        </p:spPr>
+        <p:txBody>
+          <a:bodyPr wrap="square">
+            <a:spAutoFit/>
+          </a:bodyPr>
+          <a:lstStyle/>
+          <a:p>
+            <a:pPr algn="l"/>
+            <a:r>
+              <a:rPr sz="800" b="0" i="0">
+                <a:solidFill>
+                  <a:srgbClr val="FBBF24"/>
+                </a:solidFill>
+              </a:rPr>
+              <a:t>question_length · sources_found  (if RAG attached)</a:t>
+            </a:r>
+          </a:p>
+        </p:txBody>
+      </p:sp>
+      <p:sp>
+        <p:nvSpPr>
+          <p:cNvPr id="24" name="Rectangle 23"/>
+          <p:cNvSpPr/>
+          <p:nvPr/>
+        </p:nvSpPr>
+        <p:spPr>
+          <a:xfrm>
+            <a:off x="1051560" y="5897879"/>
+            <a:ext cx="3200400" cy="457200"/>
+          </a:xfrm>
+          <a:prstGeom prst="rect">
+            <a:avLst/>
+          </a:prstGeom>
+          <a:solidFill>
+            <a:srgbClr val="0F3D2A"/>
+          </a:solidFill>
+          <a:ln>
+            <a:noFill/>
+          </a:ln>
+        </p:spPr>
+        <p:style>
+          <a:lnRef idx="1">
+            <a:schemeClr val="accent1"/>
+          </a:lnRef>
+          <a:fillRef idx="3">
+            <a:schemeClr val="accent1"/>
+          </a:fillRef>
+          <a:effectRef idx="2">
+            <a:schemeClr val="accent1"/>
+          </a:effectRef>
+          <a:fontRef idx="minor">
+            <a:schemeClr val="lt1"/>
+          </a:fontRef>
+        </p:style>
+        <p:txBody>
+          <a:bodyPr rtlCol="0" anchor="ctr"/>
+          <a:lstStyle/>
+          <a:p>
+            <a:pPr algn="ctr"/>
+            <a:endParaRPr/>
+          </a:p>
+        </p:txBody>
+      </p:sp>
+      <p:sp>
+        <p:nvSpPr>
+          <p:cNvPr id="25" name="TextBox 24"/>
+          <p:cNvSpPr txBox="1"/>
+          <p:nvPr/>
+        </p:nvSpPr>
+        <p:spPr>
+          <a:xfrm>
+            <a:off x="1078992" y="5934455"/>
+            <a:ext cx="3154680" cy="228600"/>
+          </a:xfrm>
+          <a:prstGeom prst="rect">
+            <a:avLst/>
+          </a:prstGeom>
+          <a:noFill/>
+        </p:spPr>
+        <p:txBody>
+          <a:bodyPr wrap="square">
+            <a:spAutoFit/>
+          </a:bodyPr>
+          <a:lstStyle/>
+          <a:p>
+            <a:pPr algn="l"/>
+            <a:r>
+              <a:rPr sz="1100" b="1" i="0">
+                <a:solidFill>
+                  <a:srgbClr val="FFFFFF"/>
+                </a:solidFill>
+              </a:rPr>
+              <a:t>    agent.worker ×N</a:t>
+            </a:r>
+          </a:p>
+        </p:txBody>
+      </p:sp>
+      <p:sp>
+        <p:nvSpPr>
+          <p:cNvPr id="26" name="TextBox 25"/>
+          <p:cNvSpPr txBox="1"/>
+          <p:nvPr/>
+        </p:nvSpPr>
+        <p:spPr>
+          <a:xfrm>
+            <a:off x="1078992" y="6144767"/>
+            <a:ext cx="6400800" cy="201168"/>
+          </a:xfrm>
+          <a:prstGeom prst="rect">
+            <a:avLst/>
+          </a:prstGeom>
+          <a:noFill/>
+        </p:spPr>
+        <p:txBody>
+          <a:bodyPr wrap="square">
+            <a:spAutoFit/>
+          </a:bodyPr>
+          <a:lstStyle/>
+          <a:p>
+            <a:pPr algn="l"/>
+            <a:r>
+              <a:rPr sz="800" b="0" i="0">
+                <a:solidFill>
+                  <a:srgbClr val="6EE7B7"/>
+                </a:solidFill>
+              </a:rPr>
+              <a:t>worker_name  (multi-agent runs only)</a:t>
+            </a:r>
+          </a:p>
+        </p:txBody>
+      </p:sp>
+      <p:sp>
+        <p:nvSpPr>
+          <p:cNvPr id="27" name="Rectangle 26"/>
+          <p:cNvSpPr/>
+          <p:nvPr/>
+        </p:nvSpPr>
+        <p:spPr>
+          <a:xfrm>
+            <a:off x="457200" y="6400800"/>
+            <a:ext cx="7132320" cy="502920"/>
+          </a:xfrm>
+          <a:prstGeom prst="rect">
+            <a:avLst/>
+          </a:prstGeom>
+          <a:solidFill>
+            <a:srgbClr val="021810"/>
+          </a:solidFill>
+          <a:ln w="12700">
+            <a:solidFill>
+              <a:srgbClr val="1A8A6E"/>
+            </a:solidFill>
+          </a:ln>
+        </p:spPr>
+        <p:style>
+          <a:lnRef idx="1">
+            <a:schemeClr val="accent1"/>
+          </a:lnRef>
+          <a:fillRef idx="3">
+            <a:schemeClr val="accent1"/>
+          </a:fillRef>
+          <a:effectRef idx="2">
+            <a:schemeClr val="accent1"/>
+          </a:effectRef>
+          <a:fontRef idx="minor">
+            <a:schemeClr val="lt1"/>
+          </a:fontRef>
+        </p:style>
+        <p:txBody>
+          <a:bodyPr rtlCol="0" anchor="ctr"/>
+          <a:lstStyle/>
+          <a:p>
+            <a:pPr algn="ctr"/>
+            <a:endParaRPr/>
+          </a:p>
+        </p:txBody>
+      </p:sp>
+      <p:sp>
+        <p:nvSpPr>
+          <p:cNvPr id="28" name="TextBox 27"/>
+          <p:cNvSpPr txBox="1"/>
+          <p:nvPr/>
+        </p:nvSpPr>
+        <p:spPr>
+          <a:xfrm>
+            <a:off x="594360" y="6455664"/>
+            <a:ext cx="6858000" cy="347472"/>
+          </a:xfrm>
+          <a:prstGeom prst="rect">
+            <a:avLst/>
+          </a:prstGeom>
+          <a:noFill/>
+        </p:spPr>
+        <p:txBody>
+          <a:bodyPr wrap="square">
+            <a:spAutoFit/>
+          </a:bodyPr>
+          <a:lstStyle/>
+          <a:p>
+            <a:pPr algn="l"/>
+            <a:r>
+              <a:rPr sz="1100" b="1" i="0">
+                <a:solidFill>
+                  <a:srgbClr val="6EE7B7"/>
+                </a:solidFill>
+              </a:rPr>
+              <a:t>trace_id written to AuditLog — every DB record links back to the full trace</a:t>
+            </a:r>
+          </a:p>
+        </p:txBody>
+      </p:sp>
+      <p:sp>
+        <p:nvSpPr>
+          <p:cNvPr id="29" name="Rectangle 28"/>
+          <p:cNvSpPr/>
+          <p:nvPr/>
+        </p:nvSpPr>
+        <p:spPr>
+          <a:xfrm>
+            <a:off x="7863840" y="1691640"/>
+            <a:ext cx="3867912" cy="4892040"/>
+          </a:xfrm>
+          <a:prstGeom prst="rect">
+            <a:avLst/>
+          </a:prstGeom>
+          <a:solidFill>
+            <a:srgbClr val="041220"/>
+          </a:solidFill>
+          <a:ln w="12700">
+            <a:solidFill>
+              <a:srgbClr val="335588"/>
+            </a:solidFill>
+          </a:ln>
+        </p:spPr>
+        <p:style>
+          <a:lnRef idx="1">
+            <a:schemeClr val="accent1"/>
+          </a:lnRef>
+          <a:fillRef idx="3">
+            <a:schemeClr val="accent1"/>
+          </a:fillRef>
+          <a:effectRef idx="2">
+            <a:schemeClr val="accent1"/>
+          </a:effectRef>
+          <a:fontRef idx="minor">
+            <a:schemeClr val="lt1"/>
+          </a:fontRef>
+        </p:style>
+        <p:txBody>
+          <a:bodyPr rtlCol="0" anchor="ctr"/>
+          <a:lstStyle/>
+          <a:p>
+            <a:pPr algn="ctr"/>
+            <a:endParaRPr/>
+          </a:p>
+        </p:txBody>
+      </p:sp>
+      <p:sp>
+        <p:nvSpPr>
+          <p:cNvPr id="30" name="TextBox 29"/>
+          <p:cNvSpPr txBox="1"/>
+          <p:nvPr/>
+        </p:nvSpPr>
+        <p:spPr>
+          <a:xfrm>
+            <a:off x="8001000" y="1755648"/>
+            <a:ext cx="3657600" cy="292608"/>
+          </a:xfrm>
+          <a:prstGeom prst="rect">
+            <a:avLst/>
+          </a:prstGeom>
+          <a:noFill/>
+        </p:spPr>
+        <p:txBody>
+          <a:bodyPr wrap="square">
+            <a:spAutoFit/>
+          </a:bodyPr>
+          <a:lstStyle/>
+          <a:p>
+            <a:pPr algn="l"/>
+            <a:r>
+              <a:rPr sz="900" b="1" i="0">
+                <a:solidFill>
+                  <a:srgbClr val="5599DD"/>
+                </a:solidFill>
+              </a:rPr>
+              <a:t>KEY SPAN ATTRIBUTES</a:t>
+            </a:r>
+          </a:p>
+        </p:txBody>
+      </p:sp>
+      <p:sp>
+        <p:nvSpPr>
+          <p:cNvPr id="31" name="Rectangle 30"/>
+          <p:cNvSpPr/>
+          <p:nvPr/>
+        </p:nvSpPr>
+        <p:spPr>
+          <a:xfrm>
+            <a:off x="7863840" y="2148840"/>
+            <a:ext cx="3867912" cy="658368"/>
+          </a:xfrm>
+          <a:prstGeom prst="rect">
+            <a:avLst/>
+          </a:prstGeom>
+          <a:solidFill>
+            <a:srgbClr val="081830"/>
+          </a:solidFill>
+          <a:ln>
+            <a:noFill/>
+          </a:ln>
+        </p:spPr>
+        <p:style>
+          <a:lnRef idx="1">
+            <a:schemeClr val="accent1"/>
+          </a:lnRef>
+          <a:fillRef idx="3">
+            <a:schemeClr val="accent1"/>
+          </a:fillRef>
+          <a:effectRef idx="2">
+            <a:schemeClr val="accent1"/>
+          </a:effectRef>
+          <a:fontRef idx="minor">
+            <a:schemeClr val="lt1"/>
+          </a:fontRef>
+        </p:style>
+        <p:txBody>
+          <a:bodyPr rtlCol="0" anchor="ctr"/>
+          <a:lstStyle/>
+          <a:p>
+            <a:pPr algn="ctr"/>
+            <a:endParaRPr/>
+          </a:p>
+        </p:txBody>
+      </p:sp>
+      <p:sp>
+        <p:nvSpPr>
+          <p:cNvPr id="32" name="Rectangle 31"/>
+          <p:cNvSpPr/>
+          <p:nvPr/>
+        </p:nvSpPr>
+        <p:spPr>
+          <a:xfrm>
+            <a:off x="7863840" y="2148840"/>
+            <a:ext cx="54864" cy="658368"/>
           </a:xfrm>
           <a:prstGeom prst="rect">
             <a:avLst/>
@@ -10137,48 +11120,48 @@
       </p:sp>
       <p:sp>
         <p:nvSpPr>
-          <p:cNvPr id="7" name="TextBox 6"/>
-          <p:cNvSpPr txBox="1"/>
-          <p:nvPr/>
-        </p:nvSpPr>
-        <p:spPr>
-          <a:xfrm>
-            <a:off x="566928" y="1920240"/>
-            <a:ext cx="3474720" cy="274320"/>
-          </a:xfrm>
-          <a:prstGeom prst="rect">
-            <a:avLst/>
-          </a:prstGeom>
-          <a:noFill/>
-        </p:spPr>
-        <p:txBody>
-          <a:bodyPr wrap="square">
-            <a:spAutoFit/>
-          </a:bodyPr>
-          <a:lstStyle/>
-          <a:p>
-            <a:pPr algn="l"/>
-            <a:r>
-              <a:rPr sz="1200" b="1" i="0">
-                <a:solidFill>
-                  <a:srgbClr val="FFFFFF"/>
-                </a:solidFill>
-              </a:rPr>
-              <a:t>1.  Azure AI Search (Vector RAG)</a:t>
-            </a:r>
-          </a:p>
-        </p:txBody>
-      </p:sp>
-      <p:sp>
-        <p:nvSpPr>
-          <p:cNvPr id="8" name="TextBox 7"/>
-          <p:cNvSpPr txBox="1"/>
-          <p:nvPr/>
-        </p:nvSpPr>
-        <p:spPr>
-          <a:xfrm>
-            <a:off x="566928" y="2176272"/>
-            <a:ext cx="3474720" cy="1737360"/>
+          <p:cNvPr id="33" name="TextBox 32"/>
+          <p:cNvSpPr txBox="1"/>
+          <p:nvPr/>
+        </p:nvSpPr>
+        <p:spPr>
+          <a:xfrm>
+            <a:off x="7973568" y="2176272"/>
+            <a:ext cx="3657600" cy="256032"/>
+          </a:xfrm>
+          <a:prstGeom prst="rect">
+            <a:avLst/>
+          </a:prstGeom>
+          <a:noFill/>
+        </p:spPr>
+        <p:txBody>
+          <a:bodyPr wrap="square">
+            <a:spAutoFit/>
+          </a:bodyPr>
+          <a:lstStyle/>
+          <a:p>
+            <a:pPr algn="l"/>
+            <a:r>
+              <a:rPr sz="1100" b="1" i="0">
+                <a:solidFill>
+                  <a:srgbClr val="60A5FA"/>
+                </a:solidFill>
+              </a:rPr>
+              <a:t>llm.chat</a:t>
+            </a:r>
+          </a:p>
+        </p:txBody>
+      </p:sp>
+      <p:sp>
+        <p:nvSpPr>
+          <p:cNvPr id="34" name="TextBox 33"/>
+          <p:cNvSpPr txBox="1"/>
+          <p:nvPr/>
+        </p:nvSpPr>
+        <p:spPr>
+          <a:xfrm>
+            <a:off x="7973568" y="2395728"/>
+            <a:ext cx="3657600" cy="256032"/>
           </a:xfrm>
           <a:prstGeom prst="rect">
             <a:avLst/>
@@ -10198,32 +11181,30 @@
                   <a:srgbClr val="D0D8E8"/>
                 </a:solidFill>
               </a:rPr>
-              <a:t>Replace in-memory chunks with Azure AI Search for enterprise-scale document retrieval and true semantic vector similarity.</a:t>
-            </a:r>
-          </a:p>
-        </p:txBody>
-      </p:sp>
-      <p:sp>
-        <p:nvSpPr>
-          <p:cNvPr id="9" name="Rectangle 8"/>
+              <a:t>model · tokens · latency</a:t>
+            </a:r>
+          </a:p>
+        </p:txBody>
+      </p:sp>
+      <p:sp>
+        <p:nvSpPr>
+          <p:cNvPr id="35" name="Rectangle 34"/>
           <p:cNvSpPr/>
           <p:nvPr/>
         </p:nvSpPr>
         <p:spPr>
           <a:xfrm>
-            <a:off x="4370832" y="1828800"/>
-            <a:ext cx="3657600" cy="2148840"/>
+            <a:off x="7863840" y="2852928"/>
+            <a:ext cx="3867912" cy="658368"/>
           </a:xfrm>
           <a:prstGeom prst="rect">
             <a:avLst/>
           </a:prstGeom>
           <a:solidFill>
-            <a:srgbClr val="102040"/>
+            <a:srgbClr val="051225"/>
           </a:solidFill>
-          <a:ln w="6350">
-            <a:solidFill>
-              <a:srgbClr val="334D80"/>
-            </a:solidFill>
+          <a:ln>
+            <a:noFill/>
           </a:ln>
         </p:spPr>
         <p:style>
@@ -10251,14 +11232,14 @@
       </p:sp>
       <p:sp>
         <p:nvSpPr>
-          <p:cNvPr id="10" name="Rectangle 9"/>
+          <p:cNvPr id="36" name="Rectangle 35"/>
           <p:cNvSpPr/>
           <p:nvPr/>
         </p:nvSpPr>
         <p:spPr>
           <a:xfrm>
-            <a:off x="4370832" y="1828800"/>
-            <a:ext cx="45720" cy="2148840"/>
+            <a:off x="7863840" y="2852928"/>
+            <a:ext cx="54864" cy="658368"/>
           </a:xfrm>
           <a:prstGeom prst="rect">
             <a:avLst/>
@@ -10295,48 +11276,48 @@
       </p:sp>
       <p:sp>
         <p:nvSpPr>
-          <p:cNvPr id="11" name="TextBox 10"/>
-          <p:cNvSpPr txBox="1"/>
-          <p:nvPr/>
-        </p:nvSpPr>
-        <p:spPr>
-          <a:xfrm>
-            <a:off x="4480560" y="1920240"/>
-            <a:ext cx="3474720" cy="274320"/>
-          </a:xfrm>
-          <a:prstGeom prst="rect">
-            <a:avLst/>
-          </a:prstGeom>
-          <a:noFill/>
-        </p:spPr>
-        <p:txBody>
-          <a:bodyPr wrap="square">
-            <a:spAutoFit/>
-          </a:bodyPr>
-          <a:lstStyle/>
-          <a:p>
-            <a:pPr algn="l"/>
-            <a:r>
-              <a:rPr sz="1200" b="1" i="0">
-                <a:solidFill>
-                  <a:srgbClr val="FFFFFF"/>
-                </a:solidFill>
-              </a:rPr>
-              <a:t>2.  WebSocket Streaming</a:t>
-            </a:r>
-          </a:p>
-        </p:txBody>
-      </p:sp>
-      <p:sp>
-        <p:nvSpPr>
-          <p:cNvPr id="12" name="TextBox 11"/>
-          <p:cNvSpPr txBox="1"/>
-          <p:nvPr/>
-        </p:nvSpPr>
-        <p:spPr>
-          <a:xfrm>
-            <a:off x="4480560" y="2176272"/>
-            <a:ext cx="3474720" cy="1737360"/>
+          <p:cNvPr id="37" name="TextBox 36"/>
+          <p:cNvSpPr txBox="1"/>
+          <p:nvPr/>
+        </p:nvSpPr>
+        <p:spPr>
+          <a:xfrm>
+            <a:off x="7973568" y="2880360"/>
+            <a:ext cx="3657600" cy="256032"/>
+          </a:xfrm>
+          <a:prstGeom prst="rect">
+            <a:avLst/>
+          </a:prstGeom>
+          <a:noFill/>
+        </p:spPr>
+        <p:txBody>
+          <a:bodyPr wrap="square">
+            <a:spAutoFit/>
+          </a:bodyPr>
+          <a:lstStyle/>
+          <a:p>
+            <a:pPr algn="l"/>
+            <a:r>
+              <a:rPr sz="1100" b="1" i="0">
+                <a:solidFill>
+                  <a:srgbClr val="C4B5FD"/>
+                </a:solidFill>
+              </a:rPr>
+              <a:t>agent.run</a:t>
+            </a:r>
+          </a:p>
+        </p:txBody>
+      </p:sp>
+      <p:sp>
+        <p:nvSpPr>
+          <p:cNvPr id="38" name="TextBox 37"/>
+          <p:cNvSpPr txBox="1"/>
+          <p:nvPr/>
+        </p:nvSpPr>
+        <p:spPr>
+          <a:xfrm>
+            <a:off x="7973568" y="3099816"/>
+            <a:ext cx="3657600" cy="256032"/>
           </a:xfrm>
           <a:prstGeom prst="rect">
             <a:avLst/>
@@ -10356,32 +11337,30 @@
                   <a:srgbClr val="D0D8E8"/>
                 </a:solidFill>
               </a:rPr>
-              <a:t>Real-time token-by-token agent responses. Streaming already wired in the Azure client — frontend upgrade only.</a:t>
-            </a:r>
-          </a:p>
-        </p:txBody>
-      </p:sp>
-      <p:sp>
-        <p:nvSpPr>
-          <p:cNvPr id="13" name="Rectangle 12"/>
+              <a:t>name · model · guardrail</a:t>
+            </a:r>
+          </a:p>
+        </p:txBody>
+      </p:sp>
+      <p:sp>
+        <p:nvSpPr>
+          <p:cNvPr id="39" name="Rectangle 38"/>
           <p:cNvSpPr/>
           <p:nvPr/>
         </p:nvSpPr>
         <p:spPr>
           <a:xfrm>
-            <a:off x="8284464" y="1828800"/>
-            <a:ext cx="3657600" cy="2148840"/>
+            <a:off x="7863840" y="3557016"/>
+            <a:ext cx="3867912" cy="658368"/>
           </a:xfrm>
           <a:prstGeom prst="rect">
             <a:avLst/>
           </a:prstGeom>
           <a:solidFill>
-            <a:srgbClr val="102040"/>
+            <a:srgbClr val="081830"/>
           </a:solidFill>
-          <a:ln w="6350">
-            <a:solidFill>
-              <a:srgbClr val="334D80"/>
-            </a:solidFill>
+          <a:ln>
+            <a:noFill/>
           </a:ln>
         </p:spPr>
         <p:style>
@@ -10409,14 +11388,326 @@
       </p:sp>
       <p:sp>
         <p:nvSpPr>
-          <p:cNvPr id="14" name="Rectangle 13"/>
+          <p:cNvPr id="40" name="Rectangle 39"/>
           <p:cNvSpPr/>
           <p:nvPr/>
         </p:nvSpPr>
         <p:spPr>
           <a:xfrm>
-            <a:off x="8284464" y="1828800"/>
-            <a:ext cx="45720" cy="2148840"/>
+            <a:off x="7863840" y="3557016"/>
+            <a:ext cx="54864" cy="658368"/>
+          </a:xfrm>
+          <a:prstGeom prst="rect">
+            <a:avLst/>
+          </a:prstGeom>
+          <a:solidFill>
+            <a:srgbClr val="F87171"/>
+          </a:solidFill>
+          <a:ln>
+            <a:noFill/>
+          </a:ln>
+        </p:spPr>
+        <p:style>
+          <a:lnRef idx="1">
+            <a:schemeClr val="accent1"/>
+          </a:lnRef>
+          <a:fillRef idx="3">
+            <a:schemeClr val="accent1"/>
+          </a:fillRef>
+          <a:effectRef idx="2">
+            <a:schemeClr val="accent1"/>
+          </a:effectRef>
+          <a:fontRef idx="minor">
+            <a:schemeClr val="lt1"/>
+          </a:fontRef>
+        </p:style>
+        <p:txBody>
+          <a:bodyPr rtlCol="0" anchor="ctr"/>
+          <a:lstStyle/>
+          <a:p>
+            <a:pPr algn="ctr"/>
+            <a:endParaRPr/>
+          </a:p>
+        </p:txBody>
+      </p:sp>
+      <p:sp>
+        <p:nvSpPr>
+          <p:cNvPr id="41" name="TextBox 40"/>
+          <p:cNvSpPr txBox="1"/>
+          <p:nvPr/>
+        </p:nvSpPr>
+        <p:spPr>
+          <a:xfrm>
+            <a:off x="7973568" y="3584448"/>
+            <a:ext cx="3657600" cy="256032"/>
+          </a:xfrm>
+          <a:prstGeom prst="rect">
+            <a:avLst/>
+          </a:prstGeom>
+          <a:noFill/>
+        </p:spPr>
+        <p:txBody>
+          <a:bodyPr wrap="square">
+            <a:spAutoFit/>
+          </a:bodyPr>
+          <a:lstStyle/>
+          <a:p>
+            <a:pPr algn="l"/>
+            <a:r>
+              <a:rPr sz="1100" b="1" i="0">
+                <a:solidFill>
+                  <a:srgbClr val="F87171"/>
+                </a:solidFill>
+              </a:rPr>
+              <a:t>guardrails.check</a:t>
+            </a:r>
+          </a:p>
+        </p:txBody>
+      </p:sp>
+      <p:sp>
+        <p:nvSpPr>
+          <p:cNvPr id="42" name="TextBox 41"/>
+          <p:cNvSpPr txBox="1"/>
+          <p:nvPr/>
+        </p:nvSpPr>
+        <p:spPr>
+          <a:xfrm>
+            <a:off x="7973568" y="3803904"/>
+            <a:ext cx="3657600" cy="256032"/>
+          </a:xfrm>
+          <a:prstGeom prst="rect">
+            <a:avLst/>
+          </a:prstGeom>
+          <a:noFill/>
+        </p:spPr>
+        <p:txBody>
+          <a:bodyPr wrap="square">
+            <a:spAutoFit/>
+          </a:bodyPr>
+          <a:lstStyle/>
+          <a:p>
+            <a:pPr algn="l"/>
+            <a:r>
+              <a:rPr sz="1000" b="0" i="0">
+                <a:solidFill>
+                  <a:srgbClr val="D0D8E8"/>
+                </a:solidFill>
+              </a:rPr>
+              <a:t>pii · hallucination flags</a:t>
+            </a:r>
+          </a:p>
+        </p:txBody>
+      </p:sp>
+      <p:sp>
+        <p:nvSpPr>
+          <p:cNvPr id="43" name="Rectangle 42"/>
+          <p:cNvSpPr/>
+          <p:nvPr/>
+        </p:nvSpPr>
+        <p:spPr>
+          <a:xfrm>
+            <a:off x="7863840" y="4261104"/>
+            <a:ext cx="3867912" cy="658368"/>
+          </a:xfrm>
+          <a:prstGeom prst="rect">
+            <a:avLst/>
+          </a:prstGeom>
+          <a:solidFill>
+            <a:srgbClr val="051225"/>
+          </a:solidFill>
+          <a:ln>
+            <a:noFill/>
+          </a:ln>
+        </p:spPr>
+        <p:style>
+          <a:lnRef idx="1">
+            <a:schemeClr val="accent1"/>
+          </a:lnRef>
+          <a:fillRef idx="3">
+            <a:schemeClr val="accent1"/>
+          </a:fillRef>
+          <a:effectRef idx="2">
+            <a:schemeClr val="accent1"/>
+          </a:effectRef>
+          <a:fontRef idx="minor">
+            <a:schemeClr val="lt1"/>
+          </a:fontRef>
+        </p:style>
+        <p:txBody>
+          <a:bodyPr rtlCol="0" anchor="ctr"/>
+          <a:lstStyle/>
+          <a:p>
+            <a:pPr algn="ctr"/>
+            <a:endParaRPr/>
+          </a:p>
+        </p:txBody>
+      </p:sp>
+      <p:sp>
+        <p:nvSpPr>
+          <p:cNvPr id="44" name="Rectangle 43"/>
+          <p:cNvSpPr/>
+          <p:nvPr/>
+        </p:nvSpPr>
+        <p:spPr>
+          <a:xfrm>
+            <a:off x="7863840" y="4261104"/>
+            <a:ext cx="54864" cy="658368"/>
+          </a:xfrm>
+          <a:prstGeom prst="rect">
+            <a:avLst/>
+          </a:prstGeom>
+          <a:solidFill>
+            <a:srgbClr val="FBBF24"/>
+          </a:solidFill>
+          <a:ln>
+            <a:noFill/>
+          </a:ln>
+        </p:spPr>
+        <p:style>
+          <a:lnRef idx="1">
+            <a:schemeClr val="accent1"/>
+          </a:lnRef>
+          <a:fillRef idx="3">
+            <a:schemeClr val="accent1"/>
+          </a:fillRef>
+          <a:effectRef idx="2">
+            <a:schemeClr val="accent1"/>
+          </a:effectRef>
+          <a:fontRef idx="minor">
+            <a:schemeClr val="lt1"/>
+          </a:fontRef>
+        </p:style>
+        <p:txBody>
+          <a:bodyPr rtlCol="0" anchor="ctr"/>
+          <a:lstStyle/>
+          <a:p>
+            <a:pPr algn="ctr"/>
+            <a:endParaRPr/>
+          </a:p>
+        </p:txBody>
+      </p:sp>
+      <p:sp>
+        <p:nvSpPr>
+          <p:cNvPr id="45" name="TextBox 44"/>
+          <p:cNvSpPr txBox="1"/>
+          <p:nvPr/>
+        </p:nvSpPr>
+        <p:spPr>
+          <a:xfrm>
+            <a:off x="7973568" y="4288536"/>
+            <a:ext cx="3657600" cy="256032"/>
+          </a:xfrm>
+          <a:prstGeom prst="rect">
+            <a:avLst/>
+          </a:prstGeom>
+          <a:noFill/>
+        </p:spPr>
+        <p:txBody>
+          <a:bodyPr wrap="square">
+            <a:spAutoFit/>
+          </a:bodyPr>
+          <a:lstStyle/>
+          <a:p>
+            <a:pPr algn="l"/>
+            <a:r>
+              <a:rPr sz="1100" b="1" i="0">
+                <a:solidFill>
+                  <a:srgbClr val="FBBF24"/>
+                </a:solidFill>
+              </a:rPr>
+              <a:t>rag.query</a:t>
+            </a:r>
+          </a:p>
+        </p:txBody>
+      </p:sp>
+      <p:sp>
+        <p:nvSpPr>
+          <p:cNvPr id="46" name="TextBox 45"/>
+          <p:cNvSpPr txBox="1"/>
+          <p:nvPr/>
+        </p:nvSpPr>
+        <p:spPr>
+          <a:xfrm>
+            <a:off x="7973568" y="4507992"/>
+            <a:ext cx="3657600" cy="256032"/>
+          </a:xfrm>
+          <a:prstGeom prst="rect">
+            <a:avLst/>
+          </a:prstGeom>
+          <a:noFill/>
+        </p:spPr>
+        <p:txBody>
+          <a:bodyPr wrap="square">
+            <a:spAutoFit/>
+          </a:bodyPr>
+          <a:lstStyle/>
+          <a:p>
+            <a:pPr algn="l"/>
+            <a:r>
+              <a:rPr sz="1000" b="0" i="0">
+                <a:solidFill>
+                  <a:srgbClr val="D0D8E8"/>
+                </a:solidFill>
+              </a:rPr>
+              <a:t>sources_found · q_length</a:t>
+            </a:r>
+          </a:p>
+        </p:txBody>
+      </p:sp>
+      <p:sp>
+        <p:nvSpPr>
+          <p:cNvPr id="47" name="Rectangle 46"/>
+          <p:cNvSpPr/>
+          <p:nvPr/>
+        </p:nvSpPr>
+        <p:spPr>
+          <a:xfrm>
+            <a:off x="7863840" y="4965192"/>
+            <a:ext cx="3867912" cy="658368"/>
+          </a:xfrm>
+          <a:prstGeom prst="rect">
+            <a:avLst/>
+          </a:prstGeom>
+          <a:solidFill>
+            <a:srgbClr val="081830"/>
+          </a:solidFill>
+          <a:ln>
+            <a:noFill/>
+          </a:ln>
+        </p:spPr>
+        <p:style>
+          <a:lnRef idx="1">
+            <a:schemeClr val="accent1"/>
+          </a:lnRef>
+          <a:fillRef idx="3">
+            <a:schemeClr val="accent1"/>
+          </a:fillRef>
+          <a:effectRef idx="2">
+            <a:schemeClr val="accent1"/>
+          </a:effectRef>
+          <a:fontRef idx="minor">
+            <a:schemeClr val="lt1"/>
+          </a:fontRef>
+        </p:style>
+        <p:txBody>
+          <a:bodyPr rtlCol="0" anchor="ctr"/>
+          <a:lstStyle/>
+          <a:p>
+            <a:pPr algn="ctr"/>
+            <a:endParaRPr/>
+          </a:p>
+        </p:txBody>
+      </p:sp>
+      <p:sp>
+        <p:nvSpPr>
+          <p:cNvPr id="48" name="Rectangle 47"/>
+          <p:cNvSpPr/>
+          <p:nvPr/>
+        </p:nvSpPr>
+        <p:spPr>
+          <a:xfrm>
+            <a:off x="7863840" y="4965192"/>
+            <a:ext cx="54864" cy="658368"/>
           </a:xfrm>
           <a:prstGeom prst="rect">
             <a:avLst/>
@@ -10453,48 +11744,48 @@
       </p:sp>
       <p:sp>
         <p:nvSpPr>
-          <p:cNvPr id="15" name="TextBox 14"/>
-          <p:cNvSpPr txBox="1"/>
-          <p:nvPr/>
-        </p:nvSpPr>
-        <p:spPr>
-          <a:xfrm>
-            <a:off x="8394192" y="1920240"/>
-            <a:ext cx="3474720" cy="274320"/>
-          </a:xfrm>
-          <a:prstGeom prst="rect">
-            <a:avLst/>
-          </a:prstGeom>
-          <a:noFill/>
-        </p:spPr>
-        <p:txBody>
-          <a:bodyPr wrap="square">
-            <a:spAutoFit/>
-          </a:bodyPr>
-          <a:lstStyle/>
-          <a:p>
-            <a:pPr algn="l"/>
-            <a:r>
-              <a:rPr sz="1200" b="1" i="0">
-                <a:solidFill>
-                  <a:srgbClr val="FFFFFF"/>
-                </a:solidFill>
-              </a:rPr>
-              <a:t>3.  Live Tool Credentials UI</a:t>
-            </a:r>
-          </a:p>
-        </p:txBody>
-      </p:sp>
-      <p:sp>
-        <p:nvSpPr>
-          <p:cNvPr id="16" name="TextBox 15"/>
-          <p:cNvSpPr txBox="1"/>
-          <p:nvPr/>
-        </p:nvSpPr>
-        <p:spPr>
-          <a:xfrm>
-            <a:off x="8394192" y="2176272"/>
-            <a:ext cx="3474720" cy="1737360"/>
+          <p:cNvPr id="49" name="TextBox 48"/>
+          <p:cNvSpPr txBox="1"/>
+          <p:nvPr/>
+        </p:nvSpPr>
+        <p:spPr>
+          <a:xfrm>
+            <a:off x="7973568" y="4992624"/>
+            <a:ext cx="3657600" cy="256032"/>
+          </a:xfrm>
+          <a:prstGeom prst="rect">
+            <a:avLst/>
+          </a:prstGeom>
+          <a:noFill/>
+        </p:spPr>
+        <p:txBody>
+          <a:bodyPr wrap="square">
+            <a:spAutoFit/>
+          </a:bodyPr>
+          <a:lstStyle/>
+          <a:p>
+            <a:pPr algn="l"/>
+            <a:r>
+              <a:rPr sz="1100" b="1" i="0">
+                <a:solidFill>
+                  <a:srgbClr val="6EE7B7"/>
+                </a:solidFill>
+              </a:rPr>
+              <a:t>rag.ingest</a:t>
+            </a:r>
+          </a:p>
+        </p:txBody>
+      </p:sp>
+      <p:sp>
+        <p:nvSpPr>
+          <p:cNvPr id="50" name="TextBox 49"/>
+          <p:cNvSpPr txBox="1"/>
+          <p:nvPr/>
+        </p:nvSpPr>
+        <p:spPr>
+          <a:xfrm>
+            <a:off x="7973568" y="5212080"/>
+            <a:ext cx="3657600" cy="256032"/>
           </a:xfrm>
           <a:prstGeom prst="rect">
             <a:avLst/>
@@ -10514,32 +11805,30 @@
                   <a:srgbClr val="D0D8E8"/>
                 </a:solidFill>
               </a:rPr>
-              <a:t>Connect real Slack, GitHub, and email accounts via settings panel. Move from stubs to fully-live integrations.</a:t>
-            </a:r>
-          </a:p>
-        </p:txBody>
-      </p:sp>
-      <p:sp>
-        <p:nvSpPr>
-          <p:cNvPr id="17" name="Rectangle 16"/>
+              <a:t>filename · chunk_count</a:t>
+            </a:r>
+          </a:p>
+        </p:txBody>
+      </p:sp>
+      <p:sp>
+        <p:nvSpPr>
+          <p:cNvPr id="51" name="Rectangle 50"/>
           <p:cNvSpPr/>
           <p:nvPr/>
         </p:nvSpPr>
         <p:spPr>
           <a:xfrm>
-            <a:off x="457200" y="4160520"/>
-            <a:ext cx="3657600" cy="2148840"/>
+            <a:off x="7863840" y="5669280"/>
+            <a:ext cx="3867912" cy="658368"/>
           </a:xfrm>
           <a:prstGeom prst="rect">
             <a:avLst/>
           </a:prstGeom>
           <a:solidFill>
-            <a:srgbClr val="102040"/>
+            <a:srgbClr val="051225"/>
           </a:solidFill>
-          <a:ln w="6350">
-            <a:solidFill>
-              <a:srgbClr val="334D80"/>
-            </a:solidFill>
+          <a:ln>
+            <a:noFill/>
           </a:ln>
         </p:spPr>
         <p:style>
@@ -10567,20 +11856,20 @@
       </p:sp>
       <p:sp>
         <p:nvSpPr>
-          <p:cNvPr id="18" name="Rectangle 17"/>
+          <p:cNvPr id="52" name="Rectangle 51"/>
           <p:cNvSpPr/>
           <p:nvPr/>
         </p:nvSpPr>
         <p:spPr>
           <a:xfrm>
-            <a:off x="457200" y="4160520"/>
-            <a:ext cx="45720" cy="2148840"/>
+            <a:off x="7863840" y="5669280"/>
+            <a:ext cx="54864" cy="658368"/>
           </a:xfrm>
           <a:prstGeom prst="rect">
             <a:avLst/>
           </a:prstGeom>
           <a:solidFill>
-            <a:srgbClr val="FBBF24"/>
+            <a:srgbClr val="86EFAC"/>
           </a:solidFill>
           <a:ln>
             <a:noFill/>
@@ -10611,48 +11900,48 @@
       </p:sp>
       <p:sp>
         <p:nvSpPr>
-          <p:cNvPr id="19" name="TextBox 18"/>
-          <p:cNvSpPr txBox="1"/>
-          <p:nvPr/>
-        </p:nvSpPr>
-        <p:spPr>
-          <a:xfrm>
-            <a:off x="566928" y="4251959"/>
-            <a:ext cx="3474720" cy="274320"/>
-          </a:xfrm>
-          <a:prstGeom prst="rect">
-            <a:avLst/>
-          </a:prstGeom>
-          <a:noFill/>
-        </p:spPr>
-        <p:txBody>
-          <a:bodyPr wrap="square">
-            <a:spAutoFit/>
-          </a:bodyPr>
-          <a:lstStyle/>
-          <a:p>
-            <a:pPr algn="l"/>
-            <a:r>
-              <a:rPr sz="1200" b="1" i="0">
-                <a:solidFill>
-                  <a:srgbClr val="FFFFFF"/>
-                </a:solidFill>
-              </a:rPr>
-              <a:t>4.  In-Browser Agent Chat</a:t>
-            </a:r>
-          </a:p>
-        </p:txBody>
-      </p:sp>
-      <p:sp>
-        <p:nvSpPr>
-          <p:cNvPr id="20" name="TextBox 19"/>
-          <p:cNvSpPr txBox="1"/>
-          <p:nvPr/>
-        </p:nvSpPr>
-        <p:spPr>
-          <a:xfrm>
-            <a:off x="566928" y="4507992"/>
-            <a:ext cx="3474720" cy="1737360"/>
+          <p:cNvPr id="53" name="TextBox 52"/>
+          <p:cNvSpPr txBox="1"/>
+          <p:nvPr/>
+        </p:nvSpPr>
+        <p:spPr>
+          <a:xfrm>
+            <a:off x="7973568" y="5696712"/>
+            <a:ext cx="3657600" cy="256032"/>
+          </a:xfrm>
+          <a:prstGeom prst="rect">
+            <a:avLst/>
+          </a:prstGeom>
+          <a:noFill/>
+        </p:spPr>
+        <p:txBody>
+          <a:bodyPr wrap="square">
+            <a:spAutoFit/>
+          </a:bodyPr>
+          <a:lstStyle/>
+          <a:p>
+            <a:pPr algn="l"/>
+            <a:r>
+              <a:rPr sz="1100" b="1" i="0">
+                <a:solidFill>
+                  <a:srgbClr val="86EFAC"/>
+                </a:solidFill>
+              </a:rPr>
+              <a:t>agent.worker</a:t>
+            </a:r>
+          </a:p>
+        </p:txBody>
+      </p:sp>
+      <p:sp>
+        <p:nvSpPr>
+          <p:cNvPr id="54" name="TextBox 53"/>
+          <p:cNvSpPr txBox="1"/>
+          <p:nvPr/>
+        </p:nvSpPr>
+        <p:spPr>
+          <a:xfrm>
+            <a:off x="7973568" y="5916168"/>
+            <a:ext cx="3657600" cy="256032"/>
           </a:xfrm>
           <a:prstGeom prst="rect">
             <a:avLst/>
@@ -10672,323 +11961,7 @@
                   <a:srgbClr val="D0D8E8"/>
                 </a:solidFill>
               </a:rPr>
-              <a:t>Test any agent in a chat window directly in the builder — no API client needed. Instant iteration loop.</a:t>
-            </a:r>
-          </a:p>
-        </p:txBody>
-      </p:sp>
-      <p:sp>
-        <p:nvSpPr>
-          <p:cNvPr id="21" name="Rectangle 20"/>
-          <p:cNvSpPr/>
-          <p:nvPr/>
-        </p:nvSpPr>
-        <p:spPr>
-          <a:xfrm>
-            <a:off x="4370832" y="4160520"/>
-            <a:ext cx="3657600" cy="2148840"/>
-          </a:xfrm>
-          <a:prstGeom prst="rect">
-            <a:avLst/>
-          </a:prstGeom>
-          <a:solidFill>
-            <a:srgbClr val="102040"/>
-          </a:solidFill>
-          <a:ln w="6350">
-            <a:solidFill>
-              <a:srgbClr val="334D80"/>
-            </a:solidFill>
-          </a:ln>
-        </p:spPr>
-        <p:style>
-          <a:lnRef idx="1">
-            <a:schemeClr val="accent1"/>
-          </a:lnRef>
-          <a:fillRef idx="3">
-            <a:schemeClr val="accent1"/>
-          </a:fillRef>
-          <a:effectRef idx="2">
-            <a:schemeClr val="accent1"/>
-          </a:effectRef>
-          <a:fontRef idx="minor">
-            <a:schemeClr val="lt1"/>
-          </a:fontRef>
-        </p:style>
-        <p:txBody>
-          <a:bodyPr rtlCol="0" anchor="ctr"/>
-          <a:lstStyle/>
-          <a:p>
-            <a:pPr algn="ctr"/>
-            <a:endParaRPr/>
-          </a:p>
-        </p:txBody>
-      </p:sp>
-      <p:sp>
-        <p:nvSpPr>
-          <p:cNvPr id="22" name="Rectangle 21"/>
-          <p:cNvSpPr/>
-          <p:nvPr/>
-        </p:nvSpPr>
-        <p:spPr>
-          <a:xfrm>
-            <a:off x="4370832" y="4160520"/>
-            <a:ext cx="45720" cy="2148840"/>
-          </a:xfrm>
-          <a:prstGeom prst="rect">
-            <a:avLst/>
-          </a:prstGeom>
-          <a:solidFill>
-            <a:srgbClr val="F87171"/>
-          </a:solidFill>
-          <a:ln>
-            <a:noFill/>
-          </a:ln>
-        </p:spPr>
-        <p:style>
-          <a:lnRef idx="1">
-            <a:schemeClr val="accent1"/>
-          </a:lnRef>
-          <a:fillRef idx="3">
-            <a:schemeClr val="accent1"/>
-          </a:fillRef>
-          <a:effectRef idx="2">
-            <a:schemeClr val="accent1"/>
-          </a:effectRef>
-          <a:fontRef idx="minor">
-            <a:schemeClr val="lt1"/>
-          </a:fontRef>
-        </p:style>
-        <p:txBody>
-          <a:bodyPr rtlCol="0" anchor="ctr"/>
-          <a:lstStyle/>
-          <a:p>
-            <a:pPr algn="ctr"/>
-            <a:endParaRPr/>
-          </a:p>
-        </p:txBody>
-      </p:sp>
-      <p:sp>
-        <p:nvSpPr>
-          <p:cNvPr id="23" name="TextBox 22"/>
-          <p:cNvSpPr txBox="1"/>
-          <p:nvPr/>
-        </p:nvSpPr>
-        <p:spPr>
-          <a:xfrm>
-            <a:off x="4480560" y="4251959"/>
-            <a:ext cx="3474720" cy="274320"/>
-          </a:xfrm>
-          <a:prstGeom prst="rect">
-            <a:avLst/>
-          </a:prstGeom>
-          <a:noFill/>
-        </p:spPr>
-        <p:txBody>
-          <a:bodyPr wrap="square">
-            <a:spAutoFit/>
-          </a:bodyPr>
-          <a:lstStyle/>
-          <a:p>
-            <a:pPr algn="l"/>
-            <a:r>
-              <a:rPr sz="1200" b="1" i="0">
-                <a:solidFill>
-                  <a:srgbClr val="FFFFFF"/>
-                </a:solidFill>
-              </a:rPr>
-              <a:t>5.  Multi-Tenant Workspaces</a:t>
-            </a:r>
-          </a:p>
-        </p:txBody>
-      </p:sp>
-      <p:sp>
-        <p:nvSpPr>
-          <p:cNvPr id="24" name="TextBox 23"/>
-          <p:cNvSpPr txBox="1"/>
-          <p:nvPr/>
-        </p:nvSpPr>
-        <p:spPr>
-          <a:xfrm>
-            <a:off x="4480560" y="4507992"/>
-            <a:ext cx="3474720" cy="1737360"/>
-          </a:xfrm>
-          <a:prstGeom prst="rect">
-            <a:avLst/>
-          </a:prstGeom>
-          <a:noFill/>
-        </p:spPr>
-        <p:txBody>
-          <a:bodyPr wrap="square">
-            <a:spAutoFit/>
-          </a:bodyPr>
-          <a:lstStyle/>
-          <a:p>
-            <a:pPr algn="l"/>
-            <a:r>
-              <a:rPr sz="1000" b="0" i="0">
-                <a:solidFill>
-                  <a:srgbClr val="D0D8E8"/>
-                </a:solidFill>
-              </a:rPr>
-              <a:t>Isolated workspaces per team — separate agents, RAG indexes, audit logs, and quotas per tenant.</a:t>
-            </a:r>
-          </a:p>
-        </p:txBody>
-      </p:sp>
-      <p:sp>
-        <p:nvSpPr>
-          <p:cNvPr id="25" name="Rectangle 24"/>
-          <p:cNvSpPr/>
-          <p:nvPr/>
-        </p:nvSpPr>
-        <p:spPr>
-          <a:xfrm>
-            <a:off x="8284464" y="4160520"/>
-            <a:ext cx="3657600" cy="2148840"/>
-          </a:xfrm>
-          <a:prstGeom prst="rect">
-            <a:avLst/>
-          </a:prstGeom>
-          <a:solidFill>
-            <a:srgbClr val="102040"/>
-          </a:solidFill>
-          <a:ln w="6350">
-            <a:solidFill>
-              <a:srgbClr val="334D80"/>
-            </a:solidFill>
-          </a:ln>
-        </p:spPr>
-        <p:style>
-          <a:lnRef idx="1">
-            <a:schemeClr val="accent1"/>
-          </a:lnRef>
-          <a:fillRef idx="3">
-            <a:schemeClr val="accent1"/>
-          </a:fillRef>
-          <a:effectRef idx="2">
-            <a:schemeClr val="accent1"/>
-          </a:effectRef>
-          <a:fontRef idx="minor">
-            <a:schemeClr val="lt1"/>
-          </a:fontRef>
-        </p:style>
-        <p:txBody>
-          <a:bodyPr rtlCol="0" anchor="ctr"/>
-          <a:lstStyle/>
-          <a:p>
-            <a:pPr algn="ctr"/>
-            <a:endParaRPr/>
-          </a:p>
-        </p:txBody>
-      </p:sp>
-      <p:sp>
-        <p:nvSpPr>
-          <p:cNvPr id="26" name="Rectangle 25"/>
-          <p:cNvSpPr/>
-          <p:nvPr/>
-        </p:nvSpPr>
-        <p:spPr>
-          <a:xfrm>
-            <a:off x="8284464" y="4160520"/>
-            <a:ext cx="45720" cy="2148840"/>
-          </a:xfrm>
-          <a:prstGeom prst="rect">
-            <a:avLst/>
-          </a:prstGeom>
-          <a:solidFill>
-            <a:srgbClr val="AAAACC"/>
-          </a:solidFill>
-          <a:ln>
-            <a:noFill/>
-          </a:ln>
-        </p:spPr>
-        <p:style>
-          <a:lnRef idx="1">
-            <a:schemeClr val="accent1"/>
-          </a:lnRef>
-          <a:fillRef idx="3">
-            <a:schemeClr val="accent1"/>
-          </a:fillRef>
-          <a:effectRef idx="2">
-            <a:schemeClr val="accent1"/>
-          </a:effectRef>
-          <a:fontRef idx="minor">
-            <a:schemeClr val="lt1"/>
-          </a:fontRef>
-        </p:style>
-        <p:txBody>
-          <a:bodyPr rtlCol="0" anchor="ctr"/>
-          <a:lstStyle/>
-          <a:p>
-            <a:pPr algn="ctr"/>
-            <a:endParaRPr/>
-          </a:p>
-        </p:txBody>
-      </p:sp>
-      <p:sp>
-        <p:nvSpPr>
-          <p:cNvPr id="27" name="TextBox 26"/>
-          <p:cNvSpPr txBox="1"/>
-          <p:nvPr/>
-        </p:nvSpPr>
-        <p:spPr>
-          <a:xfrm>
-            <a:off x="8394192" y="4251959"/>
-            <a:ext cx="3474720" cy="274320"/>
-          </a:xfrm>
-          <a:prstGeom prst="rect">
-            <a:avLst/>
-          </a:prstGeom>
-          <a:noFill/>
-        </p:spPr>
-        <p:txBody>
-          <a:bodyPr wrap="square">
-            <a:spAutoFit/>
-          </a:bodyPr>
-          <a:lstStyle/>
-          <a:p>
-            <a:pPr algn="l"/>
-            <a:r>
-              <a:rPr sz="1200" b="1" i="0">
-                <a:solidFill>
-                  <a:srgbClr val="FFFFFF"/>
-                </a:solidFill>
-              </a:rPr>
-              <a:t>6.  GPT-4.5 Fine-Tuning</a:t>
-            </a:r>
-          </a:p>
-        </p:txBody>
-      </p:sp>
-      <p:sp>
-        <p:nvSpPr>
-          <p:cNvPr id="28" name="TextBox 27"/>
-          <p:cNvSpPr txBox="1"/>
-          <p:nvPr/>
-        </p:nvSpPr>
-        <p:spPr>
-          <a:xfrm>
-            <a:off x="8394192" y="4507992"/>
-            <a:ext cx="3474720" cy="1737360"/>
-          </a:xfrm>
-          <a:prstGeom prst="rect">
-            <a:avLst/>
-          </a:prstGeom>
-          <a:noFill/>
-        </p:spPr>
-        <p:txBody>
-          <a:bodyPr wrap="square">
-            <a:spAutoFit/>
-          </a:bodyPr>
-          <a:lstStyle/>
-          <a:p>
-            <a:pPr algn="l"/>
-            <a:r>
-              <a:rPr sz="1000" b="0" i="0">
-                <a:solidFill>
-                  <a:srgbClr val="D0D8E8"/>
-                </a:solidFill>
-              </a:rPr>
-              <a:t>Fine-tune GPT-4.5 deployments on domain-specific data directly from the AgentForge knowledge base UI.</a:t>
+              <a:t>worker_name per step</a:t>
             </a:r>
           </a:p>
         </p:txBody>
@@ -11002,6 +11975,2681 @@
 </file>
 
 <file path=ppt/slides/slide16.xml><?xml version="1.0" encoding="utf-8"?>
+<p:sld xmlns:a="http://schemas.openxmlformats.org/drawingml/2006/main" xmlns:r="http://schemas.openxmlformats.org/officeDocument/2006/relationships" xmlns:p="http://schemas.openxmlformats.org/presentationml/2006/main">
+  <p:cSld>
+    <p:bg>
+      <p:bgPr>
+        <a:solidFill>
+          <a:srgbClr val="EEEEEE"/>
+        </a:solidFill>
+        <a:effectLst/>
+      </p:bgPr>
+    </p:bg>
+    <p:spTree>
+      <p:nvGrpSpPr>
+        <p:cNvPr id="1" name=""/>
+        <p:cNvGrpSpPr/>
+        <p:nvPr/>
+      </p:nvGrpSpPr>
+      <p:grpSpPr>
+        <a:xfrm>
+          <a:off x="0" y="0"/>
+          <a:ext cx="0" cy="0"/>
+          <a:chOff x="0" y="0"/>
+          <a:chExt cx="0" cy="0"/>
+        </a:xfrm>
+      </p:grpSpPr>
+      <p:sp>
+        <p:nvSpPr>
+          <p:cNvPr id="2" name="TextBox 1"/>
+          <p:cNvSpPr txBox="1"/>
+          <p:nvPr/>
+        </p:nvSpPr>
+        <p:spPr>
+          <a:xfrm>
+            <a:off x="457200" y="201168"/>
+            <a:ext cx="5486400" cy="320040"/>
+          </a:xfrm>
+          <a:prstGeom prst="rect">
+            <a:avLst/>
+          </a:prstGeom>
+          <a:noFill/>
+        </p:spPr>
+        <p:txBody>
+          <a:bodyPr wrap="square">
+            <a:spAutoFit/>
+          </a:bodyPr>
+          <a:lstStyle/>
+          <a:p>
+            <a:pPr algn="l"/>
+            <a:r>
+              <a:rPr sz="1000" b="1" i="0">
+                <a:solidFill>
+                  <a:srgbClr val="64748B"/>
+                </a:solidFill>
+              </a:rPr>
+              <a:t>MULTI-CLOUD OBSERVABILITY</a:t>
+            </a:r>
+          </a:p>
+        </p:txBody>
+      </p:sp>
+      <p:sp>
+        <p:nvSpPr>
+          <p:cNvPr id="3" name="TextBox 2"/>
+          <p:cNvSpPr txBox="1"/>
+          <p:nvPr/>
+        </p:nvSpPr>
+        <p:spPr>
+          <a:xfrm>
+            <a:off x="457200" y="475488"/>
+            <a:ext cx="10972800" cy="685800"/>
+          </a:xfrm>
+          <a:prstGeom prst="rect">
+            <a:avLst/>
+          </a:prstGeom>
+          <a:noFill/>
+        </p:spPr>
+        <p:txBody>
+          <a:bodyPr wrap="square">
+            <a:spAutoFit/>
+          </a:bodyPr>
+          <a:lstStyle/>
+          <a:p>
+            <a:pPr algn="l"/>
+            <a:r>
+              <a:rPr sz="2600" b="1" i="0">
+                <a:solidFill>
+                  <a:srgbClr val="1E293B"/>
+                </a:solidFill>
+              </a:rPr>
+              <a:t>One Codebase · Any Tracing Backend</a:t>
+            </a:r>
+          </a:p>
+        </p:txBody>
+      </p:sp>
+      <p:sp>
+        <p:nvSpPr>
+          <p:cNvPr id="4" name="TextBox 3"/>
+          <p:cNvSpPr txBox="1"/>
+          <p:nvPr/>
+        </p:nvSpPr>
+        <p:spPr>
+          <a:xfrm>
+            <a:off x="457200" y="1143000"/>
+            <a:ext cx="10972800" cy="347472"/>
+          </a:xfrm>
+          <a:prstGeom prst="rect">
+            <a:avLst/>
+          </a:prstGeom>
+          <a:noFill/>
+        </p:spPr>
+        <p:txBody>
+          <a:bodyPr wrap="square">
+            <a:spAutoFit/>
+          </a:bodyPr>
+          <a:lstStyle/>
+          <a:p>
+            <a:pPr algn="l"/>
+            <a:r>
+              <a:rPr sz="1200" b="0" i="0">
+                <a:solidFill>
+                  <a:srgbClr val="64748B"/>
+                </a:solidFill>
+              </a:rPr>
+              <a:t>Set  OTEL_EXPORTER=&lt;value&gt;  in .env — no code changes, no redeployment needed.</a:t>
+            </a:r>
+          </a:p>
+        </p:txBody>
+      </p:sp>
+      <p:sp>
+        <p:nvSpPr>
+          <p:cNvPr id="5" name="Rectangle 4"/>
+          <p:cNvSpPr/>
+          <p:nvPr/>
+        </p:nvSpPr>
+        <p:spPr>
+          <a:xfrm>
+            <a:off x="365760" y="1691640"/>
+            <a:ext cx="3767328" cy="2331720"/>
+          </a:xfrm>
+          <a:prstGeom prst="rect">
+            <a:avLst/>
+          </a:prstGeom>
+          <a:solidFill>
+            <a:srgbClr val="FFFFFF"/>
+          </a:solidFill>
+          <a:ln w="9525">
+            <a:solidFill>
+              <a:srgbClr val="CCDDEE"/>
+            </a:solidFill>
+          </a:ln>
+        </p:spPr>
+        <p:style>
+          <a:lnRef idx="1">
+            <a:schemeClr val="accent1"/>
+          </a:lnRef>
+          <a:fillRef idx="3">
+            <a:schemeClr val="accent1"/>
+          </a:fillRef>
+          <a:effectRef idx="2">
+            <a:schemeClr val="accent1"/>
+          </a:effectRef>
+          <a:fontRef idx="minor">
+            <a:schemeClr val="lt1"/>
+          </a:fontRef>
+        </p:style>
+        <p:txBody>
+          <a:bodyPr rtlCol="0" anchor="ctr"/>
+          <a:lstStyle/>
+          <a:p>
+            <a:pPr algn="ctr"/>
+            <a:endParaRPr/>
+          </a:p>
+        </p:txBody>
+      </p:sp>
+      <p:sp>
+        <p:nvSpPr>
+          <p:cNvPr id="6" name="Rectangle 5"/>
+          <p:cNvSpPr/>
+          <p:nvPr/>
+        </p:nvSpPr>
+        <p:spPr>
+          <a:xfrm>
+            <a:off x="365760" y="1691640"/>
+            <a:ext cx="3767328" cy="457200"/>
+          </a:xfrm>
+          <a:prstGeom prst="rect">
+            <a:avLst/>
+          </a:prstGeom>
+          <a:solidFill>
+            <a:srgbClr val="185FA5"/>
+          </a:solidFill>
+          <a:ln>
+            <a:noFill/>
+          </a:ln>
+        </p:spPr>
+        <p:style>
+          <a:lnRef idx="1">
+            <a:schemeClr val="accent1"/>
+          </a:lnRef>
+          <a:fillRef idx="3">
+            <a:schemeClr val="accent1"/>
+          </a:fillRef>
+          <a:effectRef idx="2">
+            <a:schemeClr val="accent1"/>
+          </a:effectRef>
+          <a:fontRef idx="minor">
+            <a:schemeClr val="lt1"/>
+          </a:fontRef>
+        </p:style>
+        <p:txBody>
+          <a:bodyPr rtlCol="0" anchor="ctr"/>
+          <a:lstStyle/>
+          <a:p>
+            <a:pPr algn="ctr"/>
+            <a:endParaRPr/>
+          </a:p>
+        </p:txBody>
+      </p:sp>
+      <p:sp>
+        <p:nvSpPr>
+          <p:cNvPr id="7" name="TextBox 6"/>
+          <p:cNvSpPr txBox="1"/>
+          <p:nvPr/>
+        </p:nvSpPr>
+        <p:spPr>
+          <a:xfrm>
+            <a:off x="475488" y="1746504"/>
+            <a:ext cx="3474720" cy="347472"/>
+          </a:xfrm>
+          <a:prstGeom prst="rect">
+            <a:avLst/>
+          </a:prstGeom>
+          <a:noFill/>
+        </p:spPr>
+        <p:txBody>
+          <a:bodyPr wrap="square">
+            <a:spAutoFit/>
+          </a:bodyPr>
+          <a:lstStyle/>
+          <a:p>
+            <a:pPr algn="l"/>
+            <a:r>
+              <a:rPr sz="1100" b="1" i="0">
+                <a:solidFill>
+                  <a:srgbClr val="FFFFFF"/>
+                </a:solidFill>
+              </a:rPr>
+              <a:t>JAEGER  —  Self-Hosted Jaeger</a:t>
+            </a:r>
+          </a:p>
+        </p:txBody>
+      </p:sp>
+      <p:sp>
+        <p:nvSpPr>
+          <p:cNvPr id="8" name="TextBox 7"/>
+          <p:cNvSpPr txBox="1"/>
+          <p:nvPr/>
+        </p:nvSpPr>
+        <p:spPr>
+          <a:xfrm>
+            <a:off x="475488" y="2194560"/>
+            <a:ext cx="3520440" cy="1005840"/>
+          </a:xfrm>
+          <a:prstGeom prst="rect">
+            <a:avLst/>
+          </a:prstGeom>
+          <a:noFill/>
+        </p:spPr>
+        <p:txBody>
+          <a:bodyPr wrap="square">
+            <a:spAutoFit/>
+          </a:bodyPr>
+          <a:lstStyle/>
+          <a:p>
+            <a:pPr algn="l"/>
+            <a:r>
+              <a:rPr sz="900" b="0" i="0">
+                <a:solidFill>
+                  <a:srgbClr val="1E293B"/>
+                </a:solidFill>
+              </a:rPr>
+              <a:t>Default. Included in docker-compose.yml.
+Jaeger UI: http://localhost:16686
+OTLP ports: 4317 (gRPC) · 4318 (HTTP)
+Zero extra cost. Data stays on-premise.</a:t>
+            </a:r>
+          </a:p>
+        </p:txBody>
+      </p:sp>
+      <p:sp>
+        <p:nvSpPr>
+          <p:cNvPr id="9" name="Rectangle 8"/>
+          <p:cNvSpPr/>
+          <p:nvPr/>
+        </p:nvSpPr>
+        <p:spPr>
+          <a:xfrm>
+            <a:off x="457200" y="3172968"/>
+            <a:ext cx="3584448" cy="713232"/>
+          </a:xfrm>
+          <a:prstGeom prst="rect">
+            <a:avLst/>
+          </a:prstGeom>
+          <a:solidFill>
+            <a:srgbClr val="F0F4F8"/>
+          </a:solidFill>
+          <a:ln>
+            <a:noFill/>
+          </a:ln>
+        </p:spPr>
+        <p:style>
+          <a:lnRef idx="1">
+            <a:schemeClr val="accent1"/>
+          </a:lnRef>
+          <a:fillRef idx="3">
+            <a:schemeClr val="accent1"/>
+          </a:fillRef>
+          <a:effectRef idx="2">
+            <a:schemeClr val="accent1"/>
+          </a:effectRef>
+          <a:fontRef idx="minor">
+            <a:schemeClr val="lt1"/>
+          </a:fontRef>
+        </p:style>
+        <p:txBody>
+          <a:bodyPr rtlCol="0" anchor="ctr"/>
+          <a:lstStyle/>
+          <a:p>
+            <a:pPr algn="ctr"/>
+            <a:endParaRPr/>
+          </a:p>
+        </p:txBody>
+      </p:sp>
+      <p:sp>
+        <p:nvSpPr>
+          <p:cNvPr id="10" name="TextBox 9"/>
+          <p:cNvSpPr txBox="1"/>
+          <p:nvPr/>
+        </p:nvSpPr>
+        <p:spPr>
+          <a:xfrm>
+            <a:off x="530352" y="3200400"/>
+            <a:ext cx="3383280" cy="658368"/>
+          </a:xfrm>
+          <a:prstGeom prst="rect">
+            <a:avLst/>
+          </a:prstGeom>
+          <a:noFill/>
+        </p:spPr>
+        <p:txBody>
+          <a:bodyPr wrap="square">
+            <a:spAutoFit/>
+          </a:bodyPr>
+          <a:lstStyle/>
+          <a:p>
+            <a:pPr algn="l"/>
+            <a:r>
+              <a:rPr sz="800" b="0" i="0">
+                <a:solidFill>
+                  <a:srgbClr val="1E293B"/>
+                </a:solidFill>
+              </a:rPr>
+              <a:t>OTEL_EXPORTER=jaeger
+OTEL_EXPORTER_OTLP_ENDPOINT=
+  http://localhost:4318</a:t>
+            </a:r>
+          </a:p>
+        </p:txBody>
+      </p:sp>
+      <p:sp>
+        <p:nvSpPr>
+          <p:cNvPr id="11" name="Rectangle 10"/>
+          <p:cNvSpPr/>
+          <p:nvPr/>
+        </p:nvSpPr>
+        <p:spPr>
+          <a:xfrm>
+            <a:off x="4315968" y="1691640"/>
+            <a:ext cx="3767328" cy="2331720"/>
+          </a:xfrm>
+          <a:prstGeom prst="rect">
+            <a:avLst/>
+          </a:prstGeom>
+          <a:solidFill>
+            <a:srgbClr val="FFFFFF"/>
+          </a:solidFill>
+          <a:ln w="9525">
+            <a:solidFill>
+              <a:srgbClr val="CCDDEE"/>
+            </a:solidFill>
+          </a:ln>
+        </p:spPr>
+        <p:style>
+          <a:lnRef idx="1">
+            <a:schemeClr val="accent1"/>
+          </a:lnRef>
+          <a:fillRef idx="3">
+            <a:schemeClr val="accent1"/>
+          </a:fillRef>
+          <a:effectRef idx="2">
+            <a:schemeClr val="accent1"/>
+          </a:effectRef>
+          <a:fontRef idx="minor">
+            <a:schemeClr val="lt1"/>
+          </a:fontRef>
+        </p:style>
+        <p:txBody>
+          <a:bodyPr rtlCol="0" anchor="ctr"/>
+          <a:lstStyle/>
+          <a:p>
+            <a:pPr algn="ctr"/>
+            <a:endParaRPr/>
+          </a:p>
+        </p:txBody>
+      </p:sp>
+      <p:sp>
+        <p:nvSpPr>
+          <p:cNvPr id="12" name="Rectangle 11"/>
+          <p:cNvSpPr/>
+          <p:nvPr/>
+        </p:nvSpPr>
+        <p:spPr>
+          <a:xfrm>
+            <a:off x="4315968" y="1691640"/>
+            <a:ext cx="3767328" cy="457200"/>
+          </a:xfrm>
+          <a:prstGeom prst="rect">
+            <a:avLst/>
+          </a:prstGeom>
+          <a:solidFill>
+            <a:srgbClr val="0078D4"/>
+          </a:solidFill>
+          <a:ln>
+            <a:noFill/>
+          </a:ln>
+        </p:spPr>
+        <p:style>
+          <a:lnRef idx="1">
+            <a:schemeClr val="accent1"/>
+          </a:lnRef>
+          <a:fillRef idx="3">
+            <a:schemeClr val="accent1"/>
+          </a:fillRef>
+          <a:effectRef idx="2">
+            <a:schemeClr val="accent1"/>
+          </a:effectRef>
+          <a:fontRef idx="minor">
+            <a:schemeClr val="lt1"/>
+          </a:fontRef>
+        </p:style>
+        <p:txBody>
+          <a:bodyPr rtlCol="0" anchor="ctr"/>
+          <a:lstStyle/>
+          <a:p>
+            <a:pPr algn="ctr"/>
+            <a:endParaRPr/>
+          </a:p>
+        </p:txBody>
+      </p:sp>
+      <p:sp>
+        <p:nvSpPr>
+          <p:cNvPr id="13" name="TextBox 12"/>
+          <p:cNvSpPr txBox="1"/>
+          <p:nvPr/>
+        </p:nvSpPr>
+        <p:spPr>
+          <a:xfrm>
+            <a:off x="4425696" y="1746504"/>
+            <a:ext cx="3474720" cy="347472"/>
+          </a:xfrm>
+          <a:prstGeom prst="rect">
+            <a:avLst/>
+          </a:prstGeom>
+          <a:noFill/>
+        </p:spPr>
+        <p:txBody>
+          <a:bodyPr wrap="square">
+            <a:spAutoFit/>
+          </a:bodyPr>
+          <a:lstStyle/>
+          <a:p>
+            <a:pPr algn="l"/>
+            <a:r>
+              <a:rPr sz="1100" b="1" i="0">
+                <a:solidFill>
+                  <a:srgbClr val="FFFFFF"/>
+                </a:solidFill>
+              </a:rPr>
+              <a:t>AZURE  —  Azure Monitor /
+App Insights</a:t>
+            </a:r>
+          </a:p>
+        </p:txBody>
+      </p:sp>
+      <p:sp>
+        <p:nvSpPr>
+          <p:cNvPr id="14" name="TextBox 13"/>
+          <p:cNvSpPr txBox="1"/>
+          <p:nvPr/>
+        </p:nvSpPr>
+        <p:spPr>
+          <a:xfrm>
+            <a:off x="4425696" y="2194560"/>
+            <a:ext cx="3520440" cy="1005840"/>
+          </a:xfrm>
+          <a:prstGeom prst="rect">
+            <a:avLst/>
+          </a:prstGeom>
+          <a:noFill/>
+        </p:spPr>
+        <p:txBody>
+          <a:bodyPr wrap="square">
+            <a:spAutoFit/>
+          </a:bodyPr>
+          <a:lstStyle/>
+          <a:p>
+            <a:pPr algn="l"/>
+            <a:r>
+              <a:rPr sz="900" b="0" i="0">
+                <a:solidFill>
+                  <a:srgbClr val="1E293B"/>
+                </a:solidFill>
+              </a:rPr>
+              <a:t>Native Azure integration.
+pip install azure-monitor-opentelemetry-exporter
+Full APM: traces, logs, metrics in one place.
+Works with Azure Dashboards &amp; Alerts.</a:t>
+            </a:r>
+          </a:p>
+        </p:txBody>
+      </p:sp>
+      <p:sp>
+        <p:nvSpPr>
+          <p:cNvPr id="15" name="Rectangle 14"/>
+          <p:cNvSpPr/>
+          <p:nvPr/>
+        </p:nvSpPr>
+        <p:spPr>
+          <a:xfrm>
+            <a:off x="4407408" y="3172968"/>
+            <a:ext cx="3584448" cy="713232"/>
+          </a:xfrm>
+          <a:prstGeom prst="rect">
+            <a:avLst/>
+          </a:prstGeom>
+          <a:solidFill>
+            <a:srgbClr val="F0F4F8"/>
+          </a:solidFill>
+          <a:ln>
+            <a:noFill/>
+          </a:ln>
+        </p:spPr>
+        <p:style>
+          <a:lnRef idx="1">
+            <a:schemeClr val="accent1"/>
+          </a:lnRef>
+          <a:fillRef idx="3">
+            <a:schemeClr val="accent1"/>
+          </a:fillRef>
+          <a:effectRef idx="2">
+            <a:schemeClr val="accent1"/>
+          </a:effectRef>
+          <a:fontRef idx="minor">
+            <a:schemeClr val="lt1"/>
+          </a:fontRef>
+        </p:style>
+        <p:txBody>
+          <a:bodyPr rtlCol="0" anchor="ctr"/>
+          <a:lstStyle/>
+          <a:p>
+            <a:pPr algn="ctr"/>
+            <a:endParaRPr/>
+          </a:p>
+        </p:txBody>
+      </p:sp>
+      <p:sp>
+        <p:nvSpPr>
+          <p:cNvPr id="16" name="TextBox 15"/>
+          <p:cNvSpPr txBox="1"/>
+          <p:nvPr/>
+        </p:nvSpPr>
+        <p:spPr>
+          <a:xfrm>
+            <a:off x="4480560" y="3200400"/>
+            <a:ext cx="3383280" cy="658368"/>
+          </a:xfrm>
+          <a:prstGeom prst="rect">
+            <a:avLst/>
+          </a:prstGeom>
+          <a:noFill/>
+        </p:spPr>
+        <p:txBody>
+          <a:bodyPr wrap="square">
+            <a:spAutoFit/>
+          </a:bodyPr>
+          <a:lstStyle/>
+          <a:p>
+            <a:pPr algn="l"/>
+            <a:r>
+              <a:rPr sz="800" b="0" i="0">
+                <a:solidFill>
+                  <a:srgbClr val="1E293B"/>
+                </a:solidFill>
+              </a:rPr>
+              <a:t>OTEL_EXPORTER=azure
+AZURE_MONITOR_CONNECTION_STRING=
+  InstrumentationKey=...</a:t>
+            </a:r>
+          </a:p>
+        </p:txBody>
+      </p:sp>
+      <p:sp>
+        <p:nvSpPr>
+          <p:cNvPr id="17" name="Rectangle 16"/>
+          <p:cNvSpPr/>
+          <p:nvPr/>
+        </p:nvSpPr>
+        <p:spPr>
+          <a:xfrm>
+            <a:off x="8266176" y="1691640"/>
+            <a:ext cx="3767328" cy="2331720"/>
+          </a:xfrm>
+          <a:prstGeom prst="rect">
+            <a:avLst/>
+          </a:prstGeom>
+          <a:solidFill>
+            <a:srgbClr val="FFFFFF"/>
+          </a:solidFill>
+          <a:ln w="9525">
+            <a:solidFill>
+              <a:srgbClr val="CCDDEE"/>
+            </a:solidFill>
+          </a:ln>
+        </p:spPr>
+        <p:style>
+          <a:lnRef idx="1">
+            <a:schemeClr val="accent1"/>
+          </a:lnRef>
+          <a:fillRef idx="3">
+            <a:schemeClr val="accent1"/>
+          </a:fillRef>
+          <a:effectRef idx="2">
+            <a:schemeClr val="accent1"/>
+          </a:effectRef>
+          <a:fontRef idx="minor">
+            <a:schemeClr val="lt1"/>
+          </a:fontRef>
+        </p:style>
+        <p:txBody>
+          <a:bodyPr rtlCol="0" anchor="ctr"/>
+          <a:lstStyle/>
+          <a:p>
+            <a:pPr algn="ctr"/>
+            <a:endParaRPr/>
+          </a:p>
+        </p:txBody>
+      </p:sp>
+      <p:sp>
+        <p:nvSpPr>
+          <p:cNvPr id="18" name="Rectangle 17"/>
+          <p:cNvSpPr/>
+          <p:nvPr/>
+        </p:nvSpPr>
+        <p:spPr>
+          <a:xfrm>
+            <a:off x="8266176" y="1691640"/>
+            <a:ext cx="3767328" cy="457200"/>
+          </a:xfrm>
+          <a:prstGeom prst="rect">
+            <a:avLst/>
+          </a:prstGeom>
+          <a:solidFill>
+            <a:srgbClr val="34A853"/>
+          </a:solidFill>
+          <a:ln>
+            <a:noFill/>
+          </a:ln>
+        </p:spPr>
+        <p:style>
+          <a:lnRef idx="1">
+            <a:schemeClr val="accent1"/>
+          </a:lnRef>
+          <a:fillRef idx="3">
+            <a:schemeClr val="accent1"/>
+          </a:fillRef>
+          <a:effectRef idx="2">
+            <a:schemeClr val="accent1"/>
+          </a:effectRef>
+          <a:fontRef idx="minor">
+            <a:schemeClr val="lt1"/>
+          </a:fontRef>
+        </p:style>
+        <p:txBody>
+          <a:bodyPr rtlCol="0" anchor="ctr"/>
+          <a:lstStyle/>
+          <a:p>
+            <a:pPr algn="ctr"/>
+            <a:endParaRPr/>
+          </a:p>
+        </p:txBody>
+      </p:sp>
+      <p:sp>
+        <p:nvSpPr>
+          <p:cNvPr id="19" name="TextBox 18"/>
+          <p:cNvSpPr txBox="1"/>
+          <p:nvPr/>
+        </p:nvSpPr>
+        <p:spPr>
+          <a:xfrm>
+            <a:off x="8375904" y="1746504"/>
+            <a:ext cx="3474720" cy="347472"/>
+          </a:xfrm>
+          <a:prstGeom prst="rect">
+            <a:avLst/>
+          </a:prstGeom>
+          <a:noFill/>
+        </p:spPr>
+        <p:txBody>
+          <a:bodyPr wrap="square">
+            <a:spAutoFit/>
+          </a:bodyPr>
+          <a:lstStyle/>
+          <a:p>
+            <a:pPr algn="l"/>
+            <a:r>
+              <a:rPr sz="1100" b="1" i="0">
+                <a:solidFill>
+                  <a:srgbClr val="FFFFFF"/>
+                </a:solidFill>
+              </a:rPr>
+              <a:t>GCP  —  Google Cloud Trace</a:t>
+            </a:r>
+          </a:p>
+        </p:txBody>
+      </p:sp>
+      <p:sp>
+        <p:nvSpPr>
+          <p:cNvPr id="20" name="TextBox 19"/>
+          <p:cNvSpPr txBox="1"/>
+          <p:nvPr/>
+        </p:nvSpPr>
+        <p:spPr>
+          <a:xfrm>
+            <a:off x="8375904" y="2194560"/>
+            <a:ext cx="3520440" cy="1005840"/>
+          </a:xfrm>
+          <a:prstGeom prst="rect">
+            <a:avLst/>
+          </a:prstGeom>
+          <a:noFill/>
+        </p:spPr>
+        <p:txBody>
+          <a:bodyPr wrap="square">
+            <a:spAutoFit/>
+          </a:bodyPr>
+          <a:lstStyle/>
+          <a:p>
+            <a:pPr algn="l"/>
+            <a:r>
+              <a:rPr sz="900" b="0" i="0">
+                <a:solidFill>
+                  <a:srgbClr val="1E293B"/>
+                </a:solidFill>
+              </a:rPr>
+              <a:t>Native GCP integration.
+pip install opentelemetry-exporter-gcp-trace
+Integrates with Cloud Logging &amp; Monitoring.
+Auto-auth via Application Default Credentials.</a:t>
+            </a:r>
+          </a:p>
+        </p:txBody>
+      </p:sp>
+      <p:sp>
+        <p:nvSpPr>
+          <p:cNvPr id="21" name="Rectangle 20"/>
+          <p:cNvSpPr/>
+          <p:nvPr/>
+        </p:nvSpPr>
+        <p:spPr>
+          <a:xfrm>
+            <a:off x="8357616" y="3172968"/>
+            <a:ext cx="3584448" cy="713232"/>
+          </a:xfrm>
+          <a:prstGeom prst="rect">
+            <a:avLst/>
+          </a:prstGeom>
+          <a:solidFill>
+            <a:srgbClr val="F0F4F8"/>
+          </a:solidFill>
+          <a:ln>
+            <a:noFill/>
+          </a:ln>
+        </p:spPr>
+        <p:style>
+          <a:lnRef idx="1">
+            <a:schemeClr val="accent1"/>
+          </a:lnRef>
+          <a:fillRef idx="3">
+            <a:schemeClr val="accent1"/>
+          </a:fillRef>
+          <a:effectRef idx="2">
+            <a:schemeClr val="accent1"/>
+          </a:effectRef>
+          <a:fontRef idx="minor">
+            <a:schemeClr val="lt1"/>
+          </a:fontRef>
+        </p:style>
+        <p:txBody>
+          <a:bodyPr rtlCol="0" anchor="ctr"/>
+          <a:lstStyle/>
+          <a:p>
+            <a:pPr algn="ctr"/>
+            <a:endParaRPr/>
+          </a:p>
+        </p:txBody>
+      </p:sp>
+      <p:sp>
+        <p:nvSpPr>
+          <p:cNvPr id="22" name="TextBox 21"/>
+          <p:cNvSpPr txBox="1"/>
+          <p:nvPr/>
+        </p:nvSpPr>
+        <p:spPr>
+          <a:xfrm>
+            <a:off x="8430768" y="3200400"/>
+            <a:ext cx="3383280" cy="658368"/>
+          </a:xfrm>
+          <a:prstGeom prst="rect">
+            <a:avLst/>
+          </a:prstGeom>
+          <a:noFill/>
+        </p:spPr>
+        <p:txBody>
+          <a:bodyPr wrap="square">
+            <a:spAutoFit/>
+          </a:bodyPr>
+          <a:lstStyle/>
+          <a:p>
+            <a:pPr algn="l"/>
+            <a:r>
+              <a:rPr sz="800" b="0" i="0">
+                <a:solidFill>
+                  <a:srgbClr val="1E293B"/>
+                </a:solidFill>
+              </a:rPr>
+              <a:t>OTEL_EXPORTER=gcp
+GCP_PROJECT_ID=my-gcp-project</a:t>
+            </a:r>
+          </a:p>
+        </p:txBody>
+      </p:sp>
+      <p:sp>
+        <p:nvSpPr>
+          <p:cNvPr id="23" name="Rectangle 22"/>
+          <p:cNvSpPr/>
+          <p:nvPr/>
+        </p:nvSpPr>
+        <p:spPr>
+          <a:xfrm>
+            <a:off x="365760" y="4160520"/>
+            <a:ext cx="3767328" cy="2331720"/>
+          </a:xfrm>
+          <a:prstGeom prst="rect">
+            <a:avLst/>
+          </a:prstGeom>
+          <a:solidFill>
+            <a:srgbClr val="FFFFFF"/>
+          </a:solidFill>
+          <a:ln w="9525">
+            <a:solidFill>
+              <a:srgbClr val="CCDDEE"/>
+            </a:solidFill>
+          </a:ln>
+        </p:spPr>
+        <p:style>
+          <a:lnRef idx="1">
+            <a:schemeClr val="accent1"/>
+          </a:lnRef>
+          <a:fillRef idx="3">
+            <a:schemeClr val="accent1"/>
+          </a:fillRef>
+          <a:effectRef idx="2">
+            <a:schemeClr val="accent1"/>
+          </a:effectRef>
+          <a:fontRef idx="minor">
+            <a:schemeClr val="lt1"/>
+          </a:fontRef>
+        </p:style>
+        <p:txBody>
+          <a:bodyPr rtlCol="0" anchor="ctr"/>
+          <a:lstStyle/>
+          <a:p>
+            <a:pPr algn="ctr"/>
+            <a:endParaRPr/>
+          </a:p>
+        </p:txBody>
+      </p:sp>
+      <p:sp>
+        <p:nvSpPr>
+          <p:cNvPr id="24" name="Rectangle 23"/>
+          <p:cNvSpPr/>
+          <p:nvPr/>
+        </p:nvSpPr>
+        <p:spPr>
+          <a:xfrm>
+            <a:off x="365760" y="4160520"/>
+            <a:ext cx="3767328" cy="457200"/>
+          </a:xfrm>
+          <a:prstGeom prst="rect">
+            <a:avLst/>
+          </a:prstGeom>
+          <a:solidFill>
+            <a:srgbClr val="FF9900"/>
+          </a:solidFill>
+          <a:ln>
+            <a:noFill/>
+          </a:ln>
+        </p:spPr>
+        <p:style>
+          <a:lnRef idx="1">
+            <a:schemeClr val="accent1"/>
+          </a:lnRef>
+          <a:fillRef idx="3">
+            <a:schemeClr val="accent1"/>
+          </a:fillRef>
+          <a:effectRef idx="2">
+            <a:schemeClr val="accent1"/>
+          </a:effectRef>
+          <a:fontRef idx="minor">
+            <a:schemeClr val="lt1"/>
+          </a:fontRef>
+        </p:style>
+        <p:txBody>
+          <a:bodyPr rtlCol="0" anchor="ctr"/>
+          <a:lstStyle/>
+          <a:p>
+            <a:pPr algn="ctr"/>
+            <a:endParaRPr/>
+          </a:p>
+        </p:txBody>
+      </p:sp>
+      <p:sp>
+        <p:nvSpPr>
+          <p:cNvPr id="25" name="TextBox 24"/>
+          <p:cNvSpPr txBox="1"/>
+          <p:nvPr/>
+        </p:nvSpPr>
+        <p:spPr>
+          <a:xfrm>
+            <a:off x="475488" y="4215384"/>
+            <a:ext cx="3474720" cy="347472"/>
+          </a:xfrm>
+          <a:prstGeom prst="rect">
+            <a:avLst/>
+          </a:prstGeom>
+          <a:noFill/>
+        </p:spPr>
+        <p:txBody>
+          <a:bodyPr wrap="square">
+            <a:spAutoFit/>
+          </a:bodyPr>
+          <a:lstStyle/>
+          <a:p>
+            <a:pPr algn="l"/>
+            <a:r>
+              <a:rPr sz="1100" b="1" i="0">
+                <a:solidFill>
+                  <a:srgbClr val="1E293B"/>
+                </a:solidFill>
+              </a:rPr>
+              <a:t>AWS  —  AWS X-Ray
+(via ADOT)</a:t>
+            </a:r>
+          </a:p>
+        </p:txBody>
+      </p:sp>
+      <p:sp>
+        <p:nvSpPr>
+          <p:cNvPr id="26" name="TextBox 25"/>
+          <p:cNvSpPr txBox="1"/>
+          <p:nvPr/>
+        </p:nvSpPr>
+        <p:spPr>
+          <a:xfrm>
+            <a:off x="475488" y="4663440"/>
+            <a:ext cx="3520440" cy="1005840"/>
+          </a:xfrm>
+          <a:prstGeom prst="rect">
+            <a:avLst/>
+          </a:prstGeom>
+          <a:noFill/>
+        </p:spPr>
+        <p:txBody>
+          <a:bodyPr wrap="square">
+            <a:spAutoFit/>
+          </a:bodyPr>
+          <a:lstStyle/>
+          <a:p>
+            <a:pPr algn="l"/>
+            <a:r>
+              <a:rPr sz="900" b="0" i="0">
+                <a:solidFill>
+                  <a:srgbClr val="1E293B"/>
+                </a:solidFill>
+              </a:rPr>
+              <a:t>Deploy AWS Distro for OpenTelemetry
+(ADOT) as a sidecar or standalone collector.
+Integrates with CloudWatch, X-Ray console.
+No SDK changes — just point endpoint at ADOT.</a:t>
+            </a:r>
+          </a:p>
+        </p:txBody>
+      </p:sp>
+      <p:sp>
+        <p:nvSpPr>
+          <p:cNvPr id="27" name="Rectangle 26"/>
+          <p:cNvSpPr/>
+          <p:nvPr/>
+        </p:nvSpPr>
+        <p:spPr>
+          <a:xfrm>
+            <a:off x="457200" y="5641848"/>
+            <a:ext cx="3584448" cy="713232"/>
+          </a:xfrm>
+          <a:prstGeom prst="rect">
+            <a:avLst/>
+          </a:prstGeom>
+          <a:solidFill>
+            <a:srgbClr val="F0F4F8"/>
+          </a:solidFill>
+          <a:ln>
+            <a:noFill/>
+          </a:ln>
+        </p:spPr>
+        <p:style>
+          <a:lnRef idx="1">
+            <a:schemeClr val="accent1"/>
+          </a:lnRef>
+          <a:fillRef idx="3">
+            <a:schemeClr val="accent1"/>
+          </a:fillRef>
+          <a:effectRef idx="2">
+            <a:schemeClr val="accent1"/>
+          </a:effectRef>
+          <a:fontRef idx="minor">
+            <a:schemeClr val="lt1"/>
+          </a:fontRef>
+        </p:style>
+        <p:txBody>
+          <a:bodyPr rtlCol="0" anchor="ctr"/>
+          <a:lstStyle/>
+          <a:p>
+            <a:pPr algn="ctr"/>
+            <a:endParaRPr/>
+          </a:p>
+        </p:txBody>
+      </p:sp>
+      <p:sp>
+        <p:nvSpPr>
+          <p:cNvPr id="28" name="TextBox 27"/>
+          <p:cNvSpPr txBox="1"/>
+          <p:nvPr/>
+        </p:nvSpPr>
+        <p:spPr>
+          <a:xfrm>
+            <a:off x="530352" y="5669280"/>
+            <a:ext cx="3383280" cy="658368"/>
+          </a:xfrm>
+          <a:prstGeom prst="rect">
+            <a:avLst/>
+          </a:prstGeom>
+          <a:noFill/>
+        </p:spPr>
+        <p:txBody>
+          <a:bodyPr wrap="square">
+            <a:spAutoFit/>
+          </a:bodyPr>
+          <a:lstStyle/>
+          <a:p>
+            <a:pPr algn="l"/>
+            <a:r>
+              <a:rPr sz="800" b="0" i="0">
+                <a:solidFill>
+                  <a:srgbClr val="1E293B"/>
+                </a:solidFill>
+              </a:rPr>
+              <a:t>OTEL_EXPORTER=aws
+OTEL_EXPORTER_OTLP_ENDPOINT=
+  http://localhost:4318</a:t>
+            </a:r>
+          </a:p>
+        </p:txBody>
+      </p:sp>
+      <p:sp>
+        <p:nvSpPr>
+          <p:cNvPr id="29" name="Rectangle 28"/>
+          <p:cNvSpPr/>
+          <p:nvPr/>
+        </p:nvSpPr>
+        <p:spPr>
+          <a:xfrm>
+            <a:off x="4315968" y="4160520"/>
+            <a:ext cx="3767328" cy="2331720"/>
+          </a:xfrm>
+          <a:prstGeom prst="rect">
+            <a:avLst/>
+          </a:prstGeom>
+          <a:solidFill>
+            <a:srgbClr val="FFFFFF"/>
+          </a:solidFill>
+          <a:ln w="9525">
+            <a:solidFill>
+              <a:srgbClr val="CCDDEE"/>
+            </a:solidFill>
+          </a:ln>
+        </p:spPr>
+        <p:style>
+          <a:lnRef idx="1">
+            <a:schemeClr val="accent1"/>
+          </a:lnRef>
+          <a:fillRef idx="3">
+            <a:schemeClr val="accent1"/>
+          </a:fillRef>
+          <a:effectRef idx="2">
+            <a:schemeClr val="accent1"/>
+          </a:effectRef>
+          <a:fontRef idx="minor">
+            <a:schemeClr val="lt1"/>
+          </a:fontRef>
+        </p:style>
+        <p:txBody>
+          <a:bodyPr rtlCol="0" anchor="ctr"/>
+          <a:lstStyle/>
+          <a:p>
+            <a:pPr algn="ctr"/>
+            <a:endParaRPr/>
+          </a:p>
+        </p:txBody>
+      </p:sp>
+      <p:sp>
+        <p:nvSpPr>
+          <p:cNvPr id="30" name="Rectangle 29"/>
+          <p:cNvSpPr/>
+          <p:nvPr/>
+        </p:nvSpPr>
+        <p:spPr>
+          <a:xfrm>
+            <a:off x="4315968" y="4160520"/>
+            <a:ext cx="3767328" cy="457200"/>
+          </a:xfrm>
+          <a:prstGeom prst="rect">
+            <a:avLst/>
+          </a:prstGeom>
+          <a:solidFill>
+            <a:srgbClr val="632CA8"/>
+          </a:solidFill>
+          <a:ln>
+            <a:noFill/>
+          </a:ln>
+        </p:spPr>
+        <p:style>
+          <a:lnRef idx="1">
+            <a:schemeClr val="accent1"/>
+          </a:lnRef>
+          <a:fillRef idx="3">
+            <a:schemeClr val="accent1"/>
+          </a:fillRef>
+          <a:effectRef idx="2">
+            <a:schemeClr val="accent1"/>
+          </a:effectRef>
+          <a:fontRef idx="minor">
+            <a:schemeClr val="lt1"/>
+          </a:fontRef>
+        </p:style>
+        <p:txBody>
+          <a:bodyPr rtlCol="0" anchor="ctr"/>
+          <a:lstStyle/>
+          <a:p>
+            <a:pPr algn="ctr"/>
+            <a:endParaRPr/>
+          </a:p>
+        </p:txBody>
+      </p:sp>
+      <p:sp>
+        <p:nvSpPr>
+          <p:cNvPr id="31" name="TextBox 30"/>
+          <p:cNvSpPr txBox="1"/>
+          <p:nvPr/>
+        </p:nvSpPr>
+        <p:spPr>
+          <a:xfrm>
+            <a:off x="4425696" y="4215384"/>
+            <a:ext cx="3474720" cy="347472"/>
+          </a:xfrm>
+          <a:prstGeom prst="rect">
+            <a:avLst/>
+          </a:prstGeom>
+          <a:noFill/>
+        </p:spPr>
+        <p:txBody>
+          <a:bodyPr wrap="square">
+            <a:spAutoFit/>
+          </a:bodyPr>
+          <a:lstStyle/>
+          <a:p>
+            <a:pPr algn="l"/>
+            <a:r>
+              <a:rPr sz="1100" b="1" i="0">
+                <a:solidFill>
+                  <a:srgbClr val="FFFFFF"/>
+                </a:solidFill>
+              </a:rPr>
+              <a:t>DATADOG  —  Datadog APM</a:t>
+            </a:r>
+          </a:p>
+        </p:txBody>
+      </p:sp>
+      <p:sp>
+        <p:nvSpPr>
+          <p:cNvPr id="32" name="TextBox 31"/>
+          <p:cNvSpPr txBox="1"/>
+          <p:nvPr/>
+        </p:nvSpPr>
+        <p:spPr>
+          <a:xfrm>
+            <a:off x="4425696" y="4663440"/>
+            <a:ext cx="3520440" cy="1005840"/>
+          </a:xfrm>
+          <a:prstGeom prst="rect">
+            <a:avLst/>
+          </a:prstGeom>
+          <a:noFill/>
+        </p:spPr>
+        <p:txBody>
+          <a:bodyPr wrap="square">
+            <a:spAutoFit/>
+          </a:bodyPr>
+          <a:lstStyle/>
+          <a:p>
+            <a:pPr algn="l"/>
+            <a:r>
+              <a:rPr sz="900" b="0" i="0">
+                <a:solidFill>
+                  <a:srgbClr val="1E293B"/>
+                </a:solidFill>
+              </a:rPr>
+              <a:t>Run Datadog Agent with OTLP ingestion on.
+Full Datadog APM: flamegraphs, service map,
+error tracking, anomaly detection.
+No Datadog SDK needed in your app.</a:t>
+            </a:r>
+          </a:p>
+        </p:txBody>
+      </p:sp>
+      <p:sp>
+        <p:nvSpPr>
+          <p:cNvPr id="33" name="Rectangle 32"/>
+          <p:cNvSpPr/>
+          <p:nvPr/>
+        </p:nvSpPr>
+        <p:spPr>
+          <a:xfrm>
+            <a:off x="4407408" y="5641848"/>
+            <a:ext cx="3584448" cy="713232"/>
+          </a:xfrm>
+          <a:prstGeom prst="rect">
+            <a:avLst/>
+          </a:prstGeom>
+          <a:solidFill>
+            <a:srgbClr val="F0F4F8"/>
+          </a:solidFill>
+          <a:ln>
+            <a:noFill/>
+          </a:ln>
+        </p:spPr>
+        <p:style>
+          <a:lnRef idx="1">
+            <a:schemeClr val="accent1"/>
+          </a:lnRef>
+          <a:fillRef idx="3">
+            <a:schemeClr val="accent1"/>
+          </a:fillRef>
+          <a:effectRef idx="2">
+            <a:schemeClr val="accent1"/>
+          </a:effectRef>
+          <a:fontRef idx="minor">
+            <a:schemeClr val="lt1"/>
+          </a:fontRef>
+        </p:style>
+        <p:txBody>
+          <a:bodyPr rtlCol="0" anchor="ctr"/>
+          <a:lstStyle/>
+          <a:p>
+            <a:pPr algn="ctr"/>
+            <a:endParaRPr/>
+          </a:p>
+        </p:txBody>
+      </p:sp>
+      <p:sp>
+        <p:nvSpPr>
+          <p:cNvPr id="34" name="TextBox 33"/>
+          <p:cNvSpPr txBox="1"/>
+          <p:nvPr/>
+        </p:nvSpPr>
+        <p:spPr>
+          <a:xfrm>
+            <a:off x="4480560" y="5669280"/>
+            <a:ext cx="3383280" cy="658368"/>
+          </a:xfrm>
+          <a:prstGeom prst="rect">
+            <a:avLst/>
+          </a:prstGeom>
+          <a:noFill/>
+        </p:spPr>
+        <p:txBody>
+          <a:bodyPr wrap="square">
+            <a:spAutoFit/>
+          </a:bodyPr>
+          <a:lstStyle/>
+          <a:p>
+            <a:pPr algn="l"/>
+            <a:r>
+              <a:rPr sz="800" b="0" i="0">
+                <a:solidFill>
+                  <a:srgbClr val="1E293B"/>
+                </a:solidFill>
+              </a:rPr>
+              <a:t>OTEL_EXPORTER=datadog
+OTEL_EXPORTER_OTLP_ENDPOINT=
+  http://localhost:4318</a:t>
+            </a:r>
+          </a:p>
+        </p:txBody>
+      </p:sp>
+      <p:sp>
+        <p:nvSpPr>
+          <p:cNvPr id="35" name="Rectangle 34"/>
+          <p:cNvSpPr/>
+          <p:nvPr/>
+        </p:nvSpPr>
+        <p:spPr>
+          <a:xfrm>
+            <a:off x="8266176" y="4160520"/>
+            <a:ext cx="3767328" cy="2331720"/>
+          </a:xfrm>
+          <a:prstGeom prst="rect">
+            <a:avLst/>
+          </a:prstGeom>
+          <a:solidFill>
+            <a:srgbClr val="FFFFFF"/>
+          </a:solidFill>
+          <a:ln w="9525">
+            <a:solidFill>
+              <a:srgbClr val="CCDDEE"/>
+            </a:solidFill>
+          </a:ln>
+        </p:spPr>
+        <p:style>
+          <a:lnRef idx="1">
+            <a:schemeClr val="accent1"/>
+          </a:lnRef>
+          <a:fillRef idx="3">
+            <a:schemeClr val="accent1"/>
+          </a:fillRef>
+          <a:effectRef idx="2">
+            <a:schemeClr val="accent1"/>
+          </a:effectRef>
+          <a:fontRef idx="minor">
+            <a:schemeClr val="lt1"/>
+          </a:fontRef>
+        </p:style>
+        <p:txBody>
+          <a:bodyPr rtlCol="0" anchor="ctr"/>
+          <a:lstStyle/>
+          <a:p>
+            <a:pPr algn="ctr"/>
+            <a:endParaRPr/>
+          </a:p>
+        </p:txBody>
+      </p:sp>
+      <p:sp>
+        <p:nvSpPr>
+          <p:cNvPr id="36" name="Rectangle 35"/>
+          <p:cNvSpPr/>
+          <p:nvPr/>
+        </p:nvSpPr>
+        <p:spPr>
+          <a:xfrm>
+            <a:off x="8266176" y="4160520"/>
+            <a:ext cx="3767328" cy="457200"/>
+          </a:xfrm>
+          <a:prstGeom prst="rect">
+            <a:avLst/>
+          </a:prstGeom>
+          <a:solidFill>
+            <a:srgbClr val="556677"/>
+          </a:solidFill>
+          <a:ln>
+            <a:noFill/>
+          </a:ln>
+        </p:spPr>
+        <p:style>
+          <a:lnRef idx="1">
+            <a:schemeClr val="accent1"/>
+          </a:lnRef>
+          <a:fillRef idx="3">
+            <a:schemeClr val="accent1"/>
+          </a:fillRef>
+          <a:effectRef idx="2">
+            <a:schemeClr val="accent1"/>
+          </a:effectRef>
+          <a:fontRef idx="minor">
+            <a:schemeClr val="lt1"/>
+          </a:fontRef>
+        </p:style>
+        <p:txBody>
+          <a:bodyPr rtlCol="0" anchor="ctr"/>
+          <a:lstStyle/>
+          <a:p>
+            <a:pPr algn="ctr"/>
+            <a:endParaRPr/>
+          </a:p>
+        </p:txBody>
+      </p:sp>
+      <p:sp>
+        <p:nvSpPr>
+          <p:cNvPr id="37" name="TextBox 36"/>
+          <p:cNvSpPr txBox="1"/>
+          <p:nvPr/>
+        </p:nvSpPr>
+        <p:spPr>
+          <a:xfrm>
+            <a:off x="8375904" y="4215384"/>
+            <a:ext cx="3474720" cy="347472"/>
+          </a:xfrm>
+          <a:prstGeom prst="rect">
+            <a:avLst/>
+          </a:prstGeom>
+          <a:noFill/>
+        </p:spPr>
+        <p:txBody>
+          <a:bodyPr wrap="square">
+            <a:spAutoFit/>
+          </a:bodyPr>
+          <a:lstStyle/>
+          <a:p>
+            <a:pPr algn="l"/>
+            <a:r>
+              <a:rPr sz="1100" b="1" i="0">
+                <a:solidFill>
+                  <a:srgbClr val="FFFFFF"/>
+                </a:solidFill>
+              </a:rPr>
+              <a:t>CONSOLE  —  Console / None</a:t>
+            </a:r>
+          </a:p>
+        </p:txBody>
+      </p:sp>
+      <p:sp>
+        <p:nvSpPr>
+          <p:cNvPr id="38" name="TextBox 37"/>
+          <p:cNvSpPr txBox="1"/>
+          <p:nvPr/>
+        </p:nvSpPr>
+        <p:spPr>
+          <a:xfrm>
+            <a:off x="8375904" y="4663440"/>
+            <a:ext cx="3520440" cy="1005840"/>
+          </a:xfrm>
+          <a:prstGeom prst="rect">
+            <a:avLst/>
+          </a:prstGeom>
+          <a:noFill/>
+        </p:spPr>
+        <p:txBody>
+          <a:bodyPr wrap="square">
+            <a:spAutoFit/>
+          </a:bodyPr>
+          <a:lstStyle/>
+          <a:p>
+            <a:pPr algn="l"/>
+            <a:r>
+              <a:rPr sz="900" b="0" i="0">
+                <a:solidFill>
+                  <a:srgbClr val="1E293B"/>
+                </a:solidFill>
+              </a:rPr>
+              <a:t>console: prints spans to terminal stdout.
+Perfect for local dev &amp; debugging.
+none: disables OTEL entirely.
+Zero performance overhead when set to none.</a:t>
+            </a:r>
+          </a:p>
+        </p:txBody>
+      </p:sp>
+      <p:sp>
+        <p:nvSpPr>
+          <p:cNvPr id="39" name="Rectangle 38"/>
+          <p:cNvSpPr/>
+          <p:nvPr/>
+        </p:nvSpPr>
+        <p:spPr>
+          <a:xfrm>
+            <a:off x="8357616" y="5641848"/>
+            <a:ext cx="3584448" cy="713232"/>
+          </a:xfrm>
+          <a:prstGeom prst="rect">
+            <a:avLst/>
+          </a:prstGeom>
+          <a:solidFill>
+            <a:srgbClr val="F0F4F8"/>
+          </a:solidFill>
+          <a:ln>
+            <a:noFill/>
+          </a:ln>
+        </p:spPr>
+        <p:style>
+          <a:lnRef idx="1">
+            <a:schemeClr val="accent1"/>
+          </a:lnRef>
+          <a:fillRef idx="3">
+            <a:schemeClr val="accent1"/>
+          </a:fillRef>
+          <a:effectRef idx="2">
+            <a:schemeClr val="accent1"/>
+          </a:effectRef>
+          <a:fontRef idx="minor">
+            <a:schemeClr val="lt1"/>
+          </a:fontRef>
+        </p:style>
+        <p:txBody>
+          <a:bodyPr rtlCol="0" anchor="ctr"/>
+          <a:lstStyle/>
+          <a:p>
+            <a:pPr algn="ctr"/>
+            <a:endParaRPr/>
+          </a:p>
+        </p:txBody>
+      </p:sp>
+      <p:sp>
+        <p:nvSpPr>
+          <p:cNvPr id="40" name="TextBox 39"/>
+          <p:cNvSpPr txBox="1"/>
+          <p:nvPr/>
+        </p:nvSpPr>
+        <p:spPr>
+          <a:xfrm>
+            <a:off x="8430768" y="5669280"/>
+            <a:ext cx="3383280" cy="658368"/>
+          </a:xfrm>
+          <a:prstGeom prst="rect">
+            <a:avLst/>
+          </a:prstGeom>
+          <a:noFill/>
+        </p:spPr>
+        <p:txBody>
+          <a:bodyPr wrap="square">
+            <a:spAutoFit/>
+          </a:bodyPr>
+          <a:lstStyle/>
+          <a:p>
+            <a:pPr algn="l"/>
+            <a:r>
+              <a:rPr sz="800" b="0" i="0">
+                <a:solidFill>
+                  <a:srgbClr val="1E293B"/>
+                </a:solidFill>
+              </a:rPr>
+              <a:t>OTEL_EXPORTER=console
+# or
+OTEL_EXPORTER=none</a:t>
+            </a:r>
+          </a:p>
+        </p:txBody>
+      </p:sp>
+    </p:spTree>
+  </p:cSld>
+  <p:clrMapOvr>
+    <a:masterClrMapping/>
+  </p:clrMapOvr>
+</p:sld>
+</file>
+
+<file path=ppt/slides/slide17.xml><?xml version="1.0" encoding="utf-8"?>
+<p:sld xmlns:a="http://schemas.openxmlformats.org/drawingml/2006/main" xmlns:r="http://schemas.openxmlformats.org/officeDocument/2006/relationships" xmlns:p="http://schemas.openxmlformats.org/presentationml/2006/main">
+  <p:cSld>
+    <p:bg>
+      <p:bgPr>
+        <a:solidFill>
+          <a:srgbClr val="0A1628"/>
+        </a:solidFill>
+        <a:effectLst/>
+      </p:bgPr>
+    </p:bg>
+    <p:spTree>
+      <p:nvGrpSpPr>
+        <p:cNvPr id="1" name=""/>
+        <p:cNvGrpSpPr/>
+        <p:nvPr/>
+      </p:nvGrpSpPr>
+      <p:grpSpPr>
+        <a:xfrm>
+          <a:off x="0" y="0"/>
+          <a:ext cx="0" cy="0"/>
+          <a:chOff x="0" y="0"/>
+          <a:chExt cx="0" cy="0"/>
+        </a:xfrm>
+      </p:grpSpPr>
+      <p:sp>
+        <p:nvSpPr>
+          <p:cNvPr id="2" name="Rectangle 1"/>
+          <p:cNvSpPr/>
+          <p:nvPr/>
+        </p:nvSpPr>
+        <p:spPr>
+          <a:xfrm>
+            <a:off x="0" y="0"/>
+            <a:ext cx="12188952" cy="6858000"/>
+          </a:xfrm>
+          <a:prstGeom prst="rect">
+            <a:avLst/>
+          </a:prstGeom>
+          <a:solidFill>
+            <a:srgbClr val="0A1628"/>
+          </a:solidFill>
+          <a:ln>
+            <a:noFill/>
+          </a:ln>
+        </p:spPr>
+        <p:style>
+          <a:lnRef idx="1">
+            <a:schemeClr val="accent1"/>
+          </a:lnRef>
+          <a:fillRef idx="3">
+            <a:schemeClr val="accent1"/>
+          </a:fillRef>
+          <a:effectRef idx="2">
+            <a:schemeClr val="accent1"/>
+          </a:effectRef>
+          <a:fontRef idx="minor">
+            <a:schemeClr val="lt1"/>
+          </a:fontRef>
+        </p:style>
+        <p:txBody>
+          <a:bodyPr rtlCol="0" anchor="ctr"/>
+          <a:lstStyle/>
+          <a:p>
+            <a:pPr algn="ctr"/>
+            <a:endParaRPr/>
+          </a:p>
+        </p:txBody>
+      </p:sp>
+      <p:sp>
+        <p:nvSpPr>
+          <p:cNvPr id="3" name="TextBox 2"/>
+          <p:cNvSpPr txBox="1"/>
+          <p:nvPr/>
+        </p:nvSpPr>
+        <p:spPr>
+          <a:xfrm>
+            <a:off x="457200" y="320040"/>
+            <a:ext cx="10972800" cy="365760"/>
+          </a:xfrm>
+          <a:prstGeom prst="rect">
+            <a:avLst/>
+          </a:prstGeom>
+          <a:noFill/>
+        </p:spPr>
+        <p:txBody>
+          <a:bodyPr wrap="square">
+            <a:spAutoFit/>
+          </a:bodyPr>
+          <a:lstStyle/>
+          <a:p>
+            <a:pPr algn="l"/>
+            <a:r>
+              <a:rPr sz="1000" b="1" i="0">
+                <a:solidFill>
+                  <a:srgbClr val="D0D8E8"/>
+                </a:solidFill>
+              </a:rPr>
+              <a:t>STRATEGIC ROADMAP</a:t>
+            </a:r>
+          </a:p>
+        </p:txBody>
+      </p:sp>
+      <p:sp>
+        <p:nvSpPr>
+          <p:cNvPr id="4" name="TextBox 3"/>
+          <p:cNvSpPr txBox="1"/>
+          <p:nvPr/>
+        </p:nvSpPr>
+        <p:spPr>
+          <a:xfrm>
+            <a:off x="457200" y="640080"/>
+            <a:ext cx="10972800" cy="1097280"/>
+          </a:xfrm>
+          <a:prstGeom prst="rect">
+            <a:avLst/>
+          </a:prstGeom>
+          <a:noFill/>
+        </p:spPr>
+        <p:txBody>
+          <a:bodyPr wrap="square">
+            <a:spAutoFit/>
+          </a:bodyPr>
+          <a:lstStyle/>
+          <a:p>
+            <a:pPr algn="l"/>
+            <a:r>
+              <a:rPr sz="2800" b="1" i="0">
+                <a:solidFill>
+                  <a:srgbClr val="FFFFFF"/>
+                </a:solidFill>
+              </a:rPr>
+              <a:t>What Comes Next — AgentForge</a:t>
+            </a:r>
+          </a:p>
+        </p:txBody>
+      </p:sp>
+      <p:sp>
+        <p:nvSpPr>
+          <p:cNvPr id="5" name="Rectangle 4"/>
+          <p:cNvSpPr/>
+          <p:nvPr/>
+        </p:nvSpPr>
+        <p:spPr>
+          <a:xfrm>
+            <a:off x="457200" y="1828800"/>
+            <a:ext cx="3657600" cy="2148840"/>
+          </a:xfrm>
+          <a:prstGeom prst="rect">
+            <a:avLst/>
+          </a:prstGeom>
+          <a:solidFill>
+            <a:srgbClr val="102040"/>
+          </a:solidFill>
+          <a:ln w="6350">
+            <a:solidFill>
+              <a:srgbClr val="334D80"/>
+            </a:solidFill>
+          </a:ln>
+        </p:spPr>
+        <p:style>
+          <a:lnRef idx="1">
+            <a:schemeClr val="accent1"/>
+          </a:lnRef>
+          <a:fillRef idx="3">
+            <a:schemeClr val="accent1"/>
+          </a:fillRef>
+          <a:effectRef idx="2">
+            <a:schemeClr val="accent1"/>
+          </a:effectRef>
+          <a:fontRef idx="minor">
+            <a:schemeClr val="lt1"/>
+          </a:fontRef>
+        </p:style>
+        <p:txBody>
+          <a:bodyPr rtlCol="0" anchor="ctr"/>
+          <a:lstStyle/>
+          <a:p>
+            <a:pPr algn="ctr"/>
+            <a:endParaRPr/>
+          </a:p>
+        </p:txBody>
+      </p:sp>
+      <p:sp>
+        <p:nvSpPr>
+          <p:cNvPr id="6" name="Rectangle 5"/>
+          <p:cNvSpPr/>
+          <p:nvPr/>
+        </p:nvSpPr>
+        <p:spPr>
+          <a:xfrm>
+            <a:off x="457200" y="1828800"/>
+            <a:ext cx="45720" cy="2148840"/>
+          </a:xfrm>
+          <a:prstGeom prst="rect">
+            <a:avLst/>
+          </a:prstGeom>
+          <a:solidFill>
+            <a:srgbClr val="60A5FA"/>
+          </a:solidFill>
+          <a:ln>
+            <a:noFill/>
+          </a:ln>
+        </p:spPr>
+        <p:style>
+          <a:lnRef idx="1">
+            <a:schemeClr val="accent1"/>
+          </a:lnRef>
+          <a:fillRef idx="3">
+            <a:schemeClr val="accent1"/>
+          </a:fillRef>
+          <a:effectRef idx="2">
+            <a:schemeClr val="accent1"/>
+          </a:effectRef>
+          <a:fontRef idx="minor">
+            <a:schemeClr val="lt1"/>
+          </a:fontRef>
+        </p:style>
+        <p:txBody>
+          <a:bodyPr rtlCol="0" anchor="ctr"/>
+          <a:lstStyle/>
+          <a:p>
+            <a:pPr algn="ctr"/>
+            <a:endParaRPr/>
+          </a:p>
+        </p:txBody>
+      </p:sp>
+      <p:sp>
+        <p:nvSpPr>
+          <p:cNvPr id="7" name="TextBox 6"/>
+          <p:cNvSpPr txBox="1"/>
+          <p:nvPr/>
+        </p:nvSpPr>
+        <p:spPr>
+          <a:xfrm>
+            <a:off x="566928" y="1920240"/>
+            <a:ext cx="3474720" cy="274320"/>
+          </a:xfrm>
+          <a:prstGeom prst="rect">
+            <a:avLst/>
+          </a:prstGeom>
+          <a:noFill/>
+        </p:spPr>
+        <p:txBody>
+          <a:bodyPr wrap="square">
+            <a:spAutoFit/>
+          </a:bodyPr>
+          <a:lstStyle/>
+          <a:p>
+            <a:pPr algn="l"/>
+            <a:r>
+              <a:rPr sz="1200" b="1" i="0">
+                <a:solidFill>
+                  <a:srgbClr val="FFFFFF"/>
+                </a:solidFill>
+              </a:rPr>
+              <a:t>1.  Azure AI Search (Vector RAG)</a:t>
+            </a:r>
+          </a:p>
+        </p:txBody>
+      </p:sp>
+      <p:sp>
+        <p:nvSpPr>
+          <p:cNvPr id="8" name="TextBox 7"/>
+          <p:cNvSpPr txBox="1"/>
+          <p:nvPr/>
+        </p:nvSpPr>
+        <p:spPr>
+          <a:xfrm>
+            <a:off x="566928" y="2176272"/>
+            <a:ext cx="3474720" cy="1737360"/>
+          </a:xfrm>
+          <a:prstGeom prst="rect">
+            <a:avLst/>
+          </a:prstGeom>
+          <a:noFill/>
+        </p:spPr>
+        <p:txBody>
+          <a:bodyPr wrap="square">
+            <a:spAutoFit/>
+          </a:bodyPr>
+          <a:lstStyle/>
+          <a:p>
+            <a:pPr algn="l"/>
+            <a:r>
+              <a:rPr sz="1000" b="0" i="0">
+                <a:solidFill>
+                  <a:srgbClr val="D0D8E8"/>
+                </a:solidFill>
+              </a:rPr>
+              <a:t>Replace in-memory chunks with Azure AI Search for enterprise-scale document retrieval and true semantic vector similarity.</a:t>
+            </a:r>
+          </a:p>
+        </p:txBody>
+      </p:sp>
+      <p:sp>
+        <p:nvSpPr>
+          <p:cNvPr id="9" name="Rectangle 8"/>
+          <p:cNvSpPr/>
+          <p:nvPr/>
+        </p:nvSpPr>
+        <p:spPr>
+          <a:xfrm>
+            <a:off x="4370832" y="1828800"/>
+            <a:ext cx="3657600" cy="2148840"/>
+          </a:xfrm>
+          <a:prstGeom prst="rect">
+            <a:avLst/>
+          </a:prstGeom>
+          <a:solidFill>
+            <a:srgbClr val="102040"/>
+          </a:solidFill>
+          <a:ln w="6350">
+            <a:solidFill>
+              <a:srgbClr val="334D80"/>
+            </a:solidFill>
+          </a:ln>
+        </p:spPr>
+        <p:style>
+          <a:lnRef idx="1">
+            <a:schemeClr val="accent1"/>
+          </a:lnRef>
+          <a:fillRef idx="3">
+            <a:schemeClr val="accent1"/>
+          </a:fillRef>
+          <a:effectRef idx="2">
+            <a:schemeClr val="accent1"/>
+          </a:effectRef>
+          <a:fontRef idx="minor">
+            <a:schemeClr val="lt1"/>
+          </a:fontRef>
+        </p:style>
+        <p:txBody>
+          <a:bodyPr rtlCol="0" anchor="ctr"/>
+          <a:lstStyle/>
+          <a:p>
+            <a:pPr algn="ctr"/>
+            <a:endParaRPr/>
+          </a:p>
+        </p:txBody>
+      </p:sp>
+      <p:sp>
+        <p:nvSpPr>
+          <p:cNvPr id="10" name="Rectangle 9"/>
+          <p:cNvSpPr/>
+          <p:nvPr/>
+        </p:nvSpPr>
+        <p:spPr>
+          <a:xfrm>
+            <a:off x="4370832" y="1828800"/>
+            <a:ext cx="45720" cy="2148840"/>
+          </a:xfrm>
+          <a:prstGeom prst="rect">
+            <a:avLst/>
+          </a:prstGeom>
+          <a:solidFill>
+            <a:srgbClr val="C4B5FD"/>
+          </a:solidFill>
+          <a:ln>
+            <a:noFill/>
+          </a:ln>
+        </p:spPr>
+        <p:style>
+          <a:lnRef idx="1">
+            <a:schemeClr val="accent1"/>
+          </a:lnRef>
+          <a:fillRef idx="3">
+            <a:schemeClr val="accent1"/>
+          </a:fillRef>
+          <a:effectRef idx="2">
+            <a:schemeClr val="accent1"/>
+          </a:effectRef>
+          <a:fontRef idx="minor">
+            <a:schemeClr val="lt1"/>
+          </a:fontRef>
+        </p:style>
+        <p:txBody>
+          <a:bodyPr rtlCol="0" anchor="ctr"/>
+          <a:lstStyle/>
+          <a:p>
+            <a:pPr algn="ctr"/>
+            <a:endParaRPr/>
+          </a:p>
+        </p:txBody>
+      </p:sp>
+      <p:sp>
+        <p:nvSpPr>
+          <p:cNvPr id="11" name="TextBox 10"/>
+          <p:cNvSpPr txBox="1"/>
+          <p:nvPr/>
+        </p:nvSpPr>
+        <p:spPr>
+          <a:xfrm>
+            <a:off x="4480560" y="1920240"/>
+            <a:ext cx="3474720" cy="274320"/>
+          </a:xfrm>
+          <a:prstGeom prst="rect">
+            <a:avLst/>
+          </a:prstGeom>
+          <a:noFill/>
+        </p:spPr>
+        <p:txBody>
+          <a:bodyPr wrap="square">
+            <a:spAutoFit/>
+          </a:bodyPr>
+          <a:lstStyle/>
+          <a:p>
+            <a:pPr algn="l"/>
+            <a:r>
+              <a:rPr sz="1200" b="1" i="0">
+                <a:solidFill>
+                  <a:srgbClr val="FFFFFF"/>
+                </a:solidFill>
+              </a:rPr>
+              <a:t>2.  WebSocket Streaming</a:t>
+            </a:r>
+          </a:p>
+        </p:txBody>
+      </p:sp>
+      <p:sp>
+        <p:nvSpPr>
+          <p:cNvPr id="12" name="TextBox 11"/>
+          <p:cNvSpPr txBox="1"/>
+          <p:nvPr/>
+        </p:nvSpPr>
+        <p:spPr>
+          <a:xfrm>
+            <a:off x="4480560" y="2176272"/>
+            <a:ext cx="3474720" cy="1737360"/>
+          </a:xfrm>
+          <a:prstGeom prst="rect">
+            <a:avLst/>
+          </a:prstGeom>
+          <a:noFill/>
+        </p:spPr>
+        <p:txBody>
+          <a:bodyPr wrap="square">
+            <a:spAutoFit/>
+          </a:bodyPr>
+          <a:lstStyle/>
+          <a:p>
+            <a:pPr algn="l"/>
+            <a:r>
+              <a:rPr sz="1000" b="0" i="0">
+                <a:solidFill>
+                  <a:srgbClr val="D0D8E8"/>
+                </a:solidFill>
+              </a:rPr>
+              <a:t>Real-time token-by-token agent responses. Streaming already wired in the Azure client — frontend upgrade only.</a:t>
+            </a:r>
+          </a:p>
+        </p:txBody>
+      </p:sp>
+      <p:sp>
+        <p:nvSpPr>
+          <p:cNvPr id="13" name="Rectangle 12"/>
+          <p:cNvSpPr/>
+          <p:nvPr/>
+        </p:nvSpPr>
+        <p:spPr>
+          <a:xfrm>
+            <a:off x="8284464" y="1828800"/>
+            <a:ext cx="3657600" cy="2148840"/>
+          </a:xfrm>
+          <a:prstGeom prst="rect">
+            <a:avLst/>
+          </a:prstGeom>
+          <a:solidFill>
+            <a:srgbClr val="102040"/>
+          </a:solidFill>
+          <a:ln w="6350">
+            <a:solidFill>
+              <a:srgbClr val="334D80"/>
+            </a:solidFill>
+          </a:ln>
+        </p:spPr>
+        <p:style>
+          <a:lnRef idx="1">
+            <a:schemeClr val="accent1"/>
+          </a:lnRef>
+          <a:fillRef idx="3">
+            <a:schemeClr val="accent1"/>
+          </a:fillRef>
+          <a:effectRef idx="2">
+            <a:schemeClr val="accent1"/>
+          </a:effectRef>
+          <a:fontRef idx="minor">
+            <a:schemeClr val="lt1"/>
+          </a:fontRef>
+        </p:style>
+        <p:txBody>
+          <a:bodyPr rtlCol="0" anchor="ctr"/>
+          <a:lstStyle/>
+          <a:p>
+            <a:pPr algn="ctr"/>
+            <a:endParaRPr/>
+          </a:p>
+        </p:txBody>
+      </p:sp>
+      <p:sp>
+        <p:nvSpPr>
+          <p:cNvPr id="14" name="Rectangle 13"/>
+          <p:cNvSpPr/>
+          <p:nvPr/>
+        </p:nvSpPr>
+        <p:spPr>
+          <a:xfrm>
+            <a:off x="8284464" y="1828800"/>
+            <a:ext cx="45720" cy="2148840"/>
+          </a:xfrm>
+          <a:prstGeom prst="rect">
+            <a:avLst/>
+          </a:prstGeom>
+          <a:solidFill>
+            <a:srgbClr val="6EE7B7"/>
+          </a:solidFill>
+          <a:ln>
+            <a:noFill/>
+          </a:ln>
+        </p:spPr>
+        <p:style>
+          <a:lnRef idx="1">
+            <a:schemeClr val="accent1"/>
+          </a:lnRef>
+          <a:fillRef idx="3">
+            <a:schemeClr val="accent1"/>
+          </a:fillRef>
+          <a:effectRef idx="2">
+            <a:schemeClr val="accent1"/>
+          </a:effectRef>
+          <a:fontRef idx="minor">
+            <a:schemeClr val="lt1"/>
+          </a:fontRef>
+        </p:style>
+        <p:txBody>
+          <a:bodyPr rtlCol="0" anchor="ctr"/>
+          <a:lstStyle/>
+          <a:p>
+            <a:pPr algn="ctr"/>
+            <a:endParaRPr/>
+          </a:p>
+        </p:txBody>
+      </p:sp>
+      <p:sp>
+        <p:nvSpPr>
+          <p:cNvPr id="15" name="TextBox 14"/>
+          <p:cNvSpPr txBox="1"/>
+          <p:nvPr/>
+        </p:nvSpPr>
+        <p:spPr>
+          <a:xfrm>
+            <a:off x="8394192" y="1920240"/>
+            <a:ext cx="3474720" cy="274320"/>
+          </a:xfrm>
+          <a:prstGeom prst="rect">
+            <a:avLst/>
+          </a:prstGeom>
+          <a:noFill/>
+        </p:spPr>
+        <p:txBody>
+          <a:bodyPr wrap="square">
+            <a:spAutoFit/>
+          </a:bodyPr>
+          <a:lstStyle/>
+          <a:p>
+            <a:pPr algn="l"/>
+            <a:r>
+              <a:rPr sz="1200" b="1" i="0">
+                <a:solidFill>
+                  <a:srgbClr val="FFFFFF"/>
+                </a:solidFill>
+              </a:rPr>
+              <a:t>3.  Live Tool Credentials UI</a:t>
+            </a:r>
+          </a:p>
+        </p:txBody>
+      </p:sp>
+      <p:sp>
+        <p:nvSpPr>
+          <p:cNvPr id="16" name="TextBox 15"/>
+          <p:cNvSpPr txBox="1"/>
+          <p:nvPr/>
+        </p:nvSpPr>
+        <p:spPr>
+          <a:xfrm>
+            <a:off x="8394192" y="2176272"/>
+            <a:ext cx="3474720" cy="1737360"/>
+          </a:xfrm>
+          <a:prstGeom prst="rect">
+            <a:avLst/>
+          </a:prstGeom>
+          <a:noFill/>
+        </p:spPr>
+        <p:txBody>
+          <a:bodyPr wrap="square">
+            <a:spAutoFit/>
+          </a:bodyPr>
+          <a:lstStyle/>
+          <a:p>
+            <a:pPr algn="l"/>
+            <a:r>
+              <a:rPr sz="1000" b="0" i="0">
+                <a:solidFill>
+                  <a:srgbClr val="D0D8E8"/>
+                </a:solidFill>
+              </a:rPr>
+              <a:t>Connect real Slack, GitHub, and email accounts via settings panel. Move from stubs to fully-live integrations.</a:t>
+            </a:r>
+          </a:p>
+        </p:txBody>
+      </p:sp>
+      <p:sp>
+        <p:nvSpPr>
+          <p:cNvPr id="17" name="Rectangle 16"/>
+          <p:cNvSpPr/>
+          <p:nvPr/>
+        </p:nvSpPr>
+        <p:spPr>
+          <a:xfrm>
+            <a:off x="457200" y="4160520"/>
+            <a:ext cx="3657600" cy="2148840"/>
+          </a:xfrm>
+          <a:prstGeom prst="rect">
+            <a:avLst/>
+          </a:prstGeom>
+          <a:solidFill>
+            <a:srgbClr val="102040"/>
+          </a:solidFill>
+          <a:ln w="6350">
+            <a:solidFill>
+              <a:srgbClr val="334D80"/>
+            </a:solidFill>
+          </a:ln>
+        </p:spPr>
+        <p:style>
+          <a:lnRef idx="1">
+            <a:schemeClr val="accent1"/>
+          </a:lnRef>
+          <a:fillRef idx="3">
+            <a:schemeClr val="accent1"/>
+          </a:fillRef>
+          <a:effectRef idx="2">
+            <a:schemeClr val="accent1"/>
+          </a:effectRef>
+          <a:fontRef idx="minor">
+            <a:schemeClr val="lt1"/>
+          </a:fontRef>
+        </p:style>
+        <p:txBody>
+          <a:bodyPr rtlCol="0" anchor="ctr"/>
+          <a:lstStyle/>
+          <a:p>
+            <a:pPr algn="ctr"/>
+            <a:endParaRPr/>
+          </a:p>
+        </p:txBody>
+      </p:sp>
+      <p:sp>
+        <p:nvSpPr>
+          <p:cNvPr id="18" name="Rectangle 17"/>
+          <p:cNvSpPr/>
+          <p:nvPr/>
+        </p:nvSpPr>
+        <p:spPr>
+          <a:xfrm>
+            <a:off x="457200" y="4160520"/>
+            <a:ext cx="45720" cy="2148840"/>
+          </a:xfrm>
+          <a:prstGeom prst="rect">
+            <a:avLst/>
+          </a:prstGeom>
+          <a:solidFill>
+            <a:srgbClr val="FBBF24"/>
+          </a:solidFill>
+          <a:ln>
+            <a:noFill/>
+          </a:ln>
+        </p:spPr>
+        <p:style>
+          <a:lnRef idx="1">
+            <a:schemeClr val="accent1"/>
+          </a:lnRef>
+          <a:fillRef idx="3">
+            <a:schemeClr val="accent1"/>
+          </a:fillRef>
+          <a:effectRef idx="2">
+            <a:schemeClr val="accent1"/>
+          </a:effectRef>
+          <a:fontRef idx="minor">
+            <a:schemeClr val="lt1"/>
+          </a:fontRef>
+        </p:style>
+        <p:txBody>
+          <a:bodyPr rtlCol="0" anchor="ctr"/>
+          <a:lstStyle/>
+          <a:p>
+            <a:pPr algn="ctr"/>
+            <a:endParaRPr/>
+          </a:p>
+        </p:txBody>
+      </p:sp>
+      <p:sp>
+        <p:nvSpPr>
+          <p:cNvPr id="19" name="TextBox 18"/>
+          <p:cNvSpPr txBox="1"/>
+          <p:nvPr/>
+        </p:nvSpPr>
+        <p:spPr>
+          <a:xfrm>
+            <a:off x="566928" y="4251959"/>
+            <a:ext cx="3474720" cy="274320"/>
+          </a:xfrm>
+          <a:prstGeom prst="rect">
+            <a:avLst/>
+          </a:prstGeom>
+          <a:noFill/>
+        </p:spPr>
+        <p:txBody>
+          <a:bodyPr wrap="square">
+            <a:spAutoFit/>
+          </a:bodyPr>
+          <a:lstStyle/>
+          <a:p>
+            <a:pPr algn="l"/>
+            <a:r>
+              <a:rPr sz="1200" b="1" i="0">
+                <a:solidFill>
+                  <a:srgbClr val="FFFFFF"/>
+                </a:solidFill>
+              </a:rPr>
+              <a:t>4.  In-Browser Agent Chat</a:t>
+            </a:r>
+          </a:p>
+        </p:txBody>
+      </p:sp>
+      <p:sp>
+        <p:nvSpPr>
+          <p:cNvPr id="20" name="TextBox 19"/>
+          <p:cNvSpPr txBox="1"/>
+          <p:nvPr/>
+        </p:nvSpPr>
+        <p:spPr>
+          <a:xfrm>
+            <a:off x="566928" y="4507992"/>
+            <a:ext cx="3474720" cy="1737360"/>
+          </a:xfrm>
+          <a:prstGeom prst="rect">
+            <a:avLst/>
+          </a:prstGeom>
+          <a:noFill/>
+        </p:spPr>
+        <p:txBody>
+          <a:bodyPr wrap="square">
+            <a:spAutoFit/>
+          </a:bodyPr>
+          <a:lstStyle/>
+          <a:p>
+            <a:pPr algn="l"/>
+            <a:r>
+              <a:rPr sz="1000" b="0" i="0">
+                <a:solidFill>
+                  <a:srgbClr val="D0D8E8"/>
+                </a:solidFill>
+              </a:rPr>
+              <a:t>Test any agent in a chat window directly in the builder — no API client needed. Instant iteration loop.</a:t>
+            </a:r>
+          </a:p>
+        </p:txBody>
+      </p:sp>
+      <p:sp>
+        <p:nvSpPr>
+          <p:cNvPr id="21" name="Rectangle 20"/>
+          <p:cNvSpPr/>
+          <p:nvPr/>
+        </p:nvSpPr>
+        <p:spPr>
+          <a:xfrm>
+            <a:off x="4370832" y="4160520"/>
+            <a:ext cx="3657600" cy="2148840"/>
+          </a:xfrm>
+          <a:prstGeom prst="rect">
+            <a:avLst/>
+          </a:prstGeom>
+          <a:solidFill>
+            <a:srgbClr val="102040"/>
+          </a:solidFill>
+          <a:ln w="6350">
+            <a:solidFill>
+              <a:srgbClr val="334D80"/>
+            </a:solidFill>
+          </a:ln>
+        </p:spPr>
+        <p:style>
+          <a:lnRef idx="1">
+            <a:schemeClr val="accent1"/>
+          </a:lnRef>
+          <a:fillRef idx="3">
+            <a:schemeClr val="accent1"/>
+          </a:fillRef>
+          <a:effectRef idx="2">
+            <a:schemeClr val="accent1"/>
+          </a:effectRef>
+          <a:fontRef idx="minor">
+            <a:schemeClr val="lt1"/>
+          </a:fontRef>
+        </p:style>
+        <p:txBody>
+          <a:bodyPr rtlCol="0" anchor="ctr"/>
+          <a:lstStyle/>
+          <a:p>
+            <a:pPr algn="ctr"/>
+            <a:endParaRPr/>
+          </a:p>
+        </p:txBody>
+      </p:sp>
+      <p:sp>
+        <p:nvSpPr>
+          <p:cNvPr id="22" name="Rectangle 21"/>
+          <p:cNvSpPr/>
+          <p:nvPr/>
+        </p:nvSpPr>
+        <p:spPr>
+          <a:xfrm>
+            <a:off x="4370832" y="4160520"/>
+            <a:ext cx="45720" cy="2148840"/>
+          </a:xfrm>
+          <a:prstGeom prst="rect">
+            <a:avLst/>
+          </a:prstGeom>
+          <a:solidFill>
+            <a:srgbClr val="F87171"/>
+          </a:solidFill>
+          <a:ln>
+            <a:noFill/>
+          </a:ln>
+        </p:spPr>
+        <p:style>
+          <a:lnRef idx="1">
+            <a:schemeClr val="accent1"/>
+          </a:lnRef>
+          <a:fillRef idx="3">
+            <a:schemeClr val="accent1"/>
+          </a:fillRef>
+          <a:effectRef idx="2">
+            <a:schemeClr val="accent1"/>
+          </a:effectRef>
+          <a:fontRef idx="minor">
+            <a:schemeClr val="lt1"/>
+          </a:fontRef>
+        </p:style>
+        <p:txBody>
+          <a:bodyPr rtlCol="0" anchor="ctr"/>
+          <a:lstStyle/>
+          <a:p>
+            <a:pPr algn="ctr"/>
+            <a:endParaRPr/>
+          </a:p>
+        </p:txBody>
+      </p:sp>
+      <p:sp>
+        <p:nvSpPr>
+          <p:cNvPr id="23" name="TextBox 22"/>
+          <p:cNvSpPr txBox="1"/>
+          <p:nvPr/>
+        </p:nvSpPr>
+        <p:spPr>
+          <a:xfrm>
+            <a:off x="4480560" y="4251959"/>
+            <a:ext cx="3474720" cy="274320"/>
+          </a:xfrm>
+          <a:prstGeom prst="rect">
+            <a:avLst/>
+          </a:prstGeom>
+          <a:noFill/>
+        </p:spPr>
+        <p:txBody>
+          <a:bodyPr wrap="square">
+            <a:spAutoFit/>
+          </a:bodyPr>
+          <a:lstStyle/>
+          <a:p>
+            <a:pPr algn="l"/>
+            <a:r>
+              <a:rPr sz="1200" b="1" i="0">
+                <a:solidFill>
+                  <a:srgbClr val="FFFFFF"/>
+                </a:solidFill>
+              </a:rPr>
+              <a:t>5.  Multi-Tenant Workspaces</a:t>
+            </a:r>
+          </a:p>
+        </p:txBody>
+      </p:sp>
+      <p:sp>
+        <p:nvSpPr>
+          <p:cNvPr id="24" name="TextBox 23"/>
+          <p:cNvSpPr txBox="1"/>
+          <p:nvPr/>
+        </p:nvSpPr>
+        <p:spPr>
+          <a:xfrm>
+            <a:off x="4480560" y="4507992"/>
+            <a:ext cx="3474720" cy="1737360"/>
+          </a:xfrm>
+          <a:prstGeom prst="rect">
+            <a:avLst/>
+          </a:prstGeom>
+          <a:noFill/>
+        </p:spPr>
+        <p:txBody>
+          <a:bodyPr wrap="square">
+            <a:spAutoFit/>
+          </a:bodyPr>
+          <a:lstStyle/>
+          <a:p>
+            <a:pPr algn="l"/>
+            <a:r>
+              <a:rPr sz="1000" b="0" i="0">
+                <a:solidFill>
+                  <a:srgbClr val="D0D8E8"/>
+                </a:solidFill>
+              </a:rPr>
+              <a:t>Isolated workspaces per team — separate agents, RAG indexes, audit logs, and quotas per tenant.</a:t>
+            </a:r>
+          </a:p>
+        </p:txBody>
+      </p:sp>
+      <p:sp>
+        <p:nvSpPr>
+          <p:cNvPr id="25" name="Rectangle 24"/>
+          <p:cNvSpPr/>
+          <p:nvPr/>
+        </p:nvSpPr>
+        <p:spPr>
+          <a:xfrm>
+            <a:off x="8284464" y="4160520"/>
+            <a:ext cx="3657600" cy="2148840"/>
+          </a:xfrm>
+          <a:prstGeom prst="rect">
+            <a:avLst/>
+          </a:prstGeom>
+          <a:solidFill>
+            <a:srgbClr val="102040"/>
+          </a:solidFill>
+          <a:ln w="6350">
+            <a:solidFill>
+              <a:srgbClr val="334D80"/>
+            </a:solidFill>
+          </a:ln>
+        </p:spPr>
+        <p:style>
+          <a:lnRef idx="1">
+            <a:schemeClr val="accent1"/>
+          </a:lnRef>
+          <a:fillRef idx="3">
+            <a:schemeClr val="accent1"/>
+          </a:fillRef>
+          <a:effectRef idx="2">
+            <a:schemeClr val="accent1"/>
+          </a:effectRef>
+          <a:fontRef idx="minor">
+            <a:schemeClr val="lt1"/>
+          </a:fontRef>
+        </p:style>
+        <p:txBody>
+          <a:bodyPr rtlCol="0" anchor="ctr"/>
+          <a:lstStyle/>
+          <a:p>
+            <a:pPr algn="ctr"/>
+            <a:endParaRPr/>
+          </a:p>
+        </p:txBody>
+      </p:sp>
+      <p:sp>
+        <p:nvSpPr>
+          <p:cNvPr id="26" name="Rectangle 25"/>
+          <p:cNvSpPr/>
+          <p:nvPr/>
+        </p:nvSpPr>
+        <p:spPr>
+          <a:xfrm>
+            <a:off x="8284464" y="4160520"/>
+            <a:ext cx="45720" cy="2148840"/>
+          </a:xfrm>
+          <a:prstGeom prst="rect">
+            <a:avLst/>
+          </a:prstGeom>
+          <a:solidFill>
+            <a:srgbClr val="6EE7B7"/>
+          </a:solidFill>
+          <a:ln>
+            <a:noFill/>
+          </a:ln>
+        </p:spPr>
+        <p:style>
+          <a:lnRef idx="1">
+            <a:schemeClr val="accent1"/>
+          </a:lnRef>
+          <a:fillRef idx="3">
+            <a:schemeClr val="accent1"/>
+          </a:fillRef>
+          <a:effectRef idx="2">
+            <a:schemeClr val="accent1"/>
+          </a:effectRef>
+          <a:fontRef idx="minor">
+            <a:schemeClr val="lt1"/>
+          </a:fontRef>
+        </p:style>
+        <p:txBody>
+          <a:bodyPr rtlCol="0" anchor="ctr"/>
+          <a:lstStyle/>
+          <a:p>
+            <a:pPr algn="ctr"/>
+            <a:endParaRPr/>
+          </a:p>
+        </p:txBody>
+      </p:sp>
+      <p:sp>
+        <p:nvSpPr>
+          <p:cNvPr id="27" name="TextBox 26"/>
+          <p:cNvSpPr txBox="1"/>
+          <p:nvPr/>
+        </p:nvSpPr>
+        <p:spPr>
+          <a:xfrm>
+            <a:off x="8394192" y="4251959"/>
+            <a:ext cx="3474720" cy="274320"/>
+          </a:xfrm>
+          <a:prstGeom prst="rect">
+            <a:avLst/>
+          </a:prstGeom>
+          <a:noFill/>
+        </p:spPr>
+        <p:txBody>
+          <a:bodyPr wrap="square">
+            <a:spAutoFit/>
+          </a:bodyPr>
+          <a:lstStyle/>
+          <a:p>
+            <a:pPr algn="l"/>
+            <a:r>
+              <a:rPr sz="1200" b="1" i="0">
+                <a:solidFill>
+                  <a:srgbClr val="FFFFFF"/>
+                </a:solidFill>
+              </a:rPr>
+              <a:t>6.  OTEL Metrics Pipeline</a:t>
+            </a:r>
+          </a:p>
+        </p:txBody>
+      </p:sp>
+      <p:sp>
+        <p:nvSpPr>
+          <p:cNvPr id="28" name="TextBox 27"/>
+          <p:cNvSpPr txBox="1"/>
+          <p:nvPr/>
+        </p:nvSpPr>
+        <p:spPr>
+          <a:xfrm>
+            <a:off x="8394192" y="4507992"/>
+            <a:ext cx="3474720" cy="1737360"/>
+          </a:xfrm>
+          <a:prstGeom prst="rect">
+            <a:avLst/>
+          </a:prstGeom>
+          <a:noFill/>
+        </p:spPr>
+        <p:txBody>
+          <a:bodyPr wrap="square">
+            <a:spAutoFit/>
+          </a:bodyPr>
+          <a:lstStyle/>
+          <a:p>
+            <a:pPr algn="l"/>
+            <a:r>
+              <a:rPr sz="1000" b="0" i="0">
+                <a:solidFill>
+                  <a:srgbClr val="D0D8E8"/>
+                </a:solidFill>
+              </a:rPr>
+              <a:t>Add token usage counters, guardrail trigger rates, error rates as OTEL metrics — exported alongside traces.</a:t>
+            </a:r>
+          </a:p>
+        </p:txBody>
+      </p:sp>
+    </p:spTree>
+  </p:cSld>
+  <p:clrMapOvr>
+    <a:masterClrMapping/>
+  </p:clrMapOvr>
+</p:sld>
+</file>
+
+<file path=ppt/slides/slide18.xml><?xml version="1.0" encoding="utf-8"?>
 <p:sld xmlns:a="http://schemas.openxmlformats.org/drawingml/2006/main" xmlns:r="http://schemas.openxmlformats.org/officeDocument/2006/relationships" xmlns:p="http://schemas.openxmlformats.org/presentationml/2006/main">
   <p:cSld>
     <p:bg>
